--- a/public/ppt-beautify/full/red-corporate.pptx
+++ b/public/ppt-beautify/full/red-corporate.pptx
@@ -2040,18 +2040,23 @@
         </p:nvSpPr>
         <p:spPr>
           <a:xfrm>
-            <a:off x="0" y="4663440"/>
-            <a:ext cx="9144000" cy="502920"/>
-          </a:xfrm>
-          <a:prstGeom prst="rect">
+            <a:off x="5943600" y="-457200"/>
+            <a:ext cx="3840480" cy="3474720"/>
+          </a:xfrm>
+          <a:prstGeom prst="ellipse">
             <a:avLst/>
           </a:prstGeom>
           <a:solidFill>
             <a:srgbClr val="FDE68A">
-              <a:alpha val="65000"/>
-            </a:srgbClr>
-          </a:solidFill>
-          <a:ln/>
+              <a:alpha val="18000"/>
+            </a:srgbClr>
+          </a:solidFill>
+          <a:ln w="12700">
+            <a:solidFill>
+              <a:srgbClr val="333333"/>
+            </a:solidFill>
+            <a:prstDash val="solid"/>
+          </a:ln>
         </p:spPr>
       </p:sp>
       <p:sp>
@@ -2062,16 +2067,23 @@
         </p:nvSpPr>
         <p:spPr>
           <a:xfrm>
-            <a:off x="0" y="0"/>
-            <a:ext cx="109728" cy="5143500"/>
-          </a:xfrm>
-          <a:prstGeom prst="rect">
-            <a:avLst/>
-          </a:prstGeom>
-          <a:solidFill>
-            <a:srgbClr val="FDE68A"/>
-          </a:solidFill>
-          <a:ln/>
+            <a:off x="-914400" y="3657600"/>
+            <a:ext cx="3200400" cy="2743200"/>
+          </a:xfrm>
+          <a:prstGeom prst="ellipse">
+            <a:avLst/>
+          </a:prstGeom>
+          <a:solidFill>
+            <a:srgbClr val="991B1B">
+              <a:alpha val="12000"/>
+            </a:srgbClr>
+          </a:solidFill>
+          <a:ln w="12700">
+            <a:solidFill>
+              <a:srgbClr val="333333"/>
+            </a:solidFill>
+            <a:prstDash val="solid"/>
+          </a:ln>
         </p:spPr>
       </p:sp>
       <p:sp>
@@ -2082,8 +2094,8 @@
         </p:nvSpPr>
         <p:spPr>
           <a:xfrm>
-            <a:off x="502920" y="1508760"/>
-            <a:ext cx="8046720" cy="1097280"/>
+            <a:off x="731520" y="1691640"/>
+            <a:ext cx="7680960" cy="1097280"/>
           </a:xfrm>
           <a:prstGeom prst="rect">
             <a:avLst/>
@@ -2095,11 +2107,11 @@
           <a:bodyPr wrap="square" rtlCol="0" anchor="ctr"/>
           <a:lstStyle/>
           <a:p>
-            <a:pPr indent="0" marL="0">
+            <a:pPr algn="ctr" indent="0" marL="0">
               <a:buNone/>
             </a:pPr>
             <a:r>
-              <a:rPr lang="en-US" sz="3200" b="1" dirty="0">
+              <a:rPr lang="en-US" sz="3600" b="1" dirty="0">
                 <a:solidFill>
                   <a:srgbClr val="FFFFFF"/>
                 </a:solidFill>
@@ -2109,7 +2121,7 @@
               </a:rPr>
               <a:t>CC_COVER_TITLE</a:t>
             </a:r>
-            <a:endParaRPr lang="en-US" sz="3200" dirty="0"/>
+            <a:endParaRPr lang="en-US" sz="3600" dirty="0"/>
           </a:p>
         </p:txBody>
       </p:sp>
@@ -2121,8 +2133,8 @@
         </p:nvSpPr>
         <p:spPr>
           <a:xfrm>
-            <a:off x="502920" y="2697480"/>
-            <a:ext cx="8046720" cy="685800"/>
+            <a:off x="731520" y="2788920"/>
+            <a:ext cx="7680960" cy="685800"/>
           </a:xfrm>
           <a:prstGeom prst="rect">
             <a:avLst/>
@@ -2134,7 +2146,7 @@
           <a:bodyPr wrap="square" rtlCol="0" anchor="ctr"/>
           <a:lstStyle/>
           <a:p>
-            <a:pPr indent="0" marL="0">
+            <a:pPr algn="ctr" indent="0" marL="0">
               <a:buNone/>
             </a:pPr>
             <a:r>
@@ -2344,55 +2356,6 @@
         </p:nvSpPr>
         <p:spPr>
           <a:xfrm>
-            <a:off x="7909560" y="201168"/>
-            <a:ext cx="685800" cy="685800"/>
-          </a:xfrm>
-          <a:prstGeom prst="ellipse">
-            <a:avLst/>
-          </a:prstGeom>
-          <a:solidFill>
-            <a:srgbClr val="FEF2F2">
-              <a:alpha val="0"/>
-            </a:srgbClr>
-          </a:solidFill>
-          <a:ln w="15875">
-            <a:solidFill>
-              <a:srgbClr val="FDE68A"/>
-            </a:solidFill>
-            <a:prstDash val="solid"/>
-          </a:ln>
-        </p:spPr>
-      </p:sp>
-      <p:sp>
-        <p:nvSpPr>
-          <p:cNvPr id="6" name="Shape 4"/>
-          <p:cNvSpPr/>
-          <p:nvPr/>
-        </p:nvSpPr>
-        <p:spPr>
-          <a:xfrm>
-            <a:off x="8183880" y="384048"/>
-            <a:ext cx="384048" cy="384048"/>
-          </a:xfrm>
-          <a:prstGeom prst="ellipse">
-            <a:avLst/>
-          </a:prstGeom>
-          <a:solidFill>
-            <a:srgbClr val="FDE68A">
-              <a:alpha val="35000"/>
-            </a:srgbClr>
-          </a:solidFill>
-          <a:ln/>
-        </p:spPr>
-      </p:sp>
-      <p:sp>
-        <p:nvSpPr>
-          <p:cNvPr id="7" name="Shape 5"/>
-          <p:cNvSpPr/>
-          <p:nvPr/>
-        </p:nvSpPr>
-        <p:spPr>
-          <a:xfrm>
             <a:off x="109728" y="0"/>
             <a:ext cx="9034272" cy="960120"/>
           </a:xfrm>
@@ -2407,7 +2370,7 @@
       </p:sp>
       <p:sp>
         <p:nvSpPr>
-          <p:cNvPr id="8" name="Shape 6"/>
+          <p:cNvPr id="6" name="Shape 4"/>
           <p:cNvSpPr/>
           <p:nvPr/>
         </p:nvSpPr>
@@ -2429,7 +2392,7 @@
       </p:sp>
       <p:sp>
         <p:nvSpPr>
-          <p:cNvPr id="9" name="Shape 7"/>
+          <p:cNvPr id="7" name="Shape 5"/>
           <p:cNvSpPr/>
           <p:nvPr/>
         </p:nvSpPr>
@@ -2451,7 +2414,7 @@
       </p:sp>
       <p:sp>
         <p:nvSpPr>
-          <p:cNvPr id="10" name="Shape 8"/>
+          <p:cNvPr id="8" name="Shape 6"/>
           <p:cNvSpPr/>
           <p:nvPr/>
         </p:nvSpPr>
@@ -2471,7 +2434,7 @@
       </p:sp>
       <p:sp>
         <p:nvSpPr>
-          <p:cNvPr id="11" name="Shape 9"/>
+          <p:cNvPr id="9" name="Shape 7"/>
           <p:cNvSpPr/>
           <p:nvPr/>
         </p:nvSpPr>
@@ -2502,7 +2465,7 @@
       </p:sp>
       <p:sp>
         <p:nvSpPr>
-          <p:cNvPr id="12" name="Text 10"/>
+          <p:cNvPr id="10" name="Text 8"/>
           <p:cNvSpPr/>
           <p:nvPr/>
         </p:nvSpPr>
@@ -2543,7 +2506,7 @@
       </p:sp>
       <p:sp>
         <p:nvSpPr>
-          <p:cNvPr id="13" name="Text 11"/>
+          <p:cNvPr id="11" name="Text 9"/>
           <p:cNvSpPr/>
           <p:nvPr/>
         </p:nvSpPr>
@@ -2582,7 +2545,7 @@
       </p:sp>
       <p:sp>
         <p:nvSpPr>
-          <p:cNvPr id="14" name="Shape 12"/>
+          <p:cNvPr id="12" name="Shape 10"/>
           <p:cNvSpPr/>
           <p:nvPr/>
         </p:nvSpPr>
@@ -2616,7 +2579,7 @@
       </p:sp>
       <p:sp>
         <p:nvSpPr>
-          <p:cNvPr id="15" name="Shape 13"/>
+          <p:cNvPr id="13" name="Shape 11"/>
           <p:cNvSpPr/>
           <p:nvPr/>
         </p:nvSpPr>
@@ -2645,7 +2608,7 @@
       </p:sp>
       <p:sp>
         <p:nvSpPr>
-          <p:cNvPr id="16" name="Shape 14"/>
+          <p:cNvPr id="14" name="Shape 12"/>
           <p:cNvSpPr/>
           <p:nvPr/>
         </p:nvSpPr>
@@ -2667,7 +2630,7 @@
       </p:sp>
       <p:sp>
         <p:nvSpPr>
-          <p:cNvPr id="17" name="Shape 15"/>
+          <p:cNvPr id="15" name="Shape 13"/>
           <p:cNvSpPr/>
           <p:nvPr/>
         </p:nvSpPr>
@@ -2701,36 +2664,7 @@
       </p:sp>
       <p:sp>
         <p:nvSpPr>
-          <p:cNvPr id="18" name="Shape 16"/>
-          <p:cNvSpPr/>
-          <p:nvPr/>
-        </p:nvSpPr>
-        <p:spPr>
-          <a:xfrm>
-            <a:off x="796625" y="1500713"/>
-            <a:ext cx="190927" cy="190927"/>
-          </a:xfrm>
-          <a:prstGeom prst="roundRect">
-            <a:avLst>
-              <a:gd name="adj" fmla="val 181992"/>
-            </a:avLst>
-          </a:prstGeom>
-          <a:solidFill>
-            <a:srgbClr val="FDE68A">
-              <a:alpha val="80000"/>
-            </a:srgbClr>
-          </a:solidFill>
-          <a:ln w="12700">
-            <a:solidFill>
-              <a:srgbClr val="333333"/>
-            </a:solidFill>
-            <a:prstDash val="solid"/>
-          </a:ln>
-        </p:spPr>
-      </p:sp>
-      <p:sp>
-        <p:nvSpPr>
-          <p:cNvPr id="19" name="Text 17"/>
+          <p:cNvPr id="16" name="Text 14"/>
           <p:cNvSpPr/>
           <p:nvPr/>
         </p:nvSpPr>
@@ -2769,7 +2703,7 @@
       </p:sp>
       <p:sp>
         <p:nvSpPr>
-          <p:cNvPr id="20" name="Text 18"/>
+          <p:cNvPr id="17" name="Text 15"/>
           <p:cNvSpPr/>
           <p:nvPr/>
         </p:nvSpPr>
@@ -2789,9 +2723,6 @@
           <a:lstStyle/>
           <a:p>
             <a:pPr indent="0" marL="0">
-              <a:lnSpc>
-                <a:spcPct val="115000"/>
-              </a:lnSpc>
               <a:buNone/>
             </a:pPr>
             <a:r>
@@ -2811,7 +2742,7 @@
       </p:sp>
       <p:sp>
         <p:nvSpPr>
-          <p:cNvPr id="21" name="Shape 19"/>
+          <p:cNvPr id="18" name="Shape 16"/>
           <p:cNvSpPr/>
           <p:nvPr/>
         </p:nvSpPr>
@@ -2840,7 +2771,7 @@
       </p:sp>
       <p:sp>
         <p:nvSpPr>
-          <p:cNvPr id="22" name="Shape 20"/>
+          <p:cNvPr id="19" name="Shape 17"/>
           <p:cNvSpPr/>
           <p:nvPr/>
         </p:nvSpPr>
@@ -2862,7 +2793,7 @@
       </p:sp>
       <p:sp>
         <p:nvSpPr>
-          <p:cNvPr id="23" name="Shape 21"/>
+          <p:cNvPr id="20" name="Shape 18"/>
           <p:cNvSpPr/>
           <p:nvPr/>
         </p:nvSpPr>
@@ -2896,36 +2827,7 @@
       </p:sp>
       <p:sp>
         <p:nvSpPr>
-          <p:cNvPr id="24" name="Shape 22"/>
-          <p:cNvSpPr/>
-          <p:nvPr/>
-        </p:nvSpPr>
-        <p:spPr>
-          <a:xfrm>
-            <a:off x="796625" y="2122505"/>
-            <a:ext cx="190927" cy="190927"/>
-          </a:xfrm>
-          <a:prstGeom prst="roundRect">
-            <a:avLst>
-              <a:gd name="adj" fmla="val 181992"/>
-            </a:avLst>
-          </a:prstGeom>
-          <a:solidFill>
-            <a:srgbClr val="FDE68A">
-              <a:alpha val="80000"/>
-            </a:srgbClr>
-          </a:solidFill>
-          <a:ln w="12700">
-            <a:solidFill>
-              <a:srgbClr val="333333"/>
-            </a:solidFill>
-            <a:prstDash val="solid"/>
-          </a:ln>
-        </p:spPr>
-      </p:sp>
-      <p:sp>
-        <p:nvSpPr>
-          <p:cNvPr id="25" name="Text 23"/>
+          <p:cNvPr id="21" name="Text 19"/>
           <p:cNvSpPr/>
           <p:nvPr/>
         </p:nvSpPr>
@@ -2964,7 +2866,7 @@
       </p:sp>
       <p:sp>
         <p:nvSpPr>
-          <p:cNvPr id="26" name="Text 24"/>
+          <p:cNvPr id="22" name="Text 20"/>
           <p:cNvSpPr/>
           <p:nvPr/>
         </p:nvSpPr>
@@ -2984,9 +2886,6 @@
           <a:lstStyle/>
           <a:p>
             <a:pPr indent="0" marL="0">
-              <a:lnSpc>
-                <a:spcPct val="115000"/>
-              </a:lnSpc>
               <a:buNone/>
             </a:pPr>
             <a:r>
@@ -3006,7 +2905,7 @@
       </p:sp>
       <p:sp>
         <p:nvSpPr>
-          <p:cNvPr id="27" name="Shape 25"/>
+          <p:cNvPr id="23" name="Shape 21"/>
           <p:cNvSpPr/>
           <p:nvPr/>
         </p:nvSpPr>
@@ -3035,7 +2934,7 @@
       </p:sp>
       <p:sp>
         <p:nvSpPr>
-          <p:cNvPr id="28" name="Shape 26"/>
+          <p:cNvPr id="24" name="Shape 22"/>
           <p:cNvSpPr/>
           <p:nvPr/>
         </p:nvSpPr>
@@ -3057,7 +2956,7 @@
       </p:sp>
       <p:sp>
         <p:nvSpPr>
-          <p:cNvPr id="29" name="Shape 27"/>
+          <p:cNvPr id="25" name="Shape 23"/>
           <p:cNvSpPr/>
           <p:nvPr/>
         </p:nvSpPr>
@@ -3091,36 +2990,7 @@
       </p:sp>
       <p:sp>
         <p:nvSpPr>
-          <p:cNvPr id="30" name="Shape 28"/>
-          <p:cNvSpPr/>
-          <p:nvPr/>
-        </p:nvSpPr>
-        <p:spPr>
-          <a:xfrm>
-            <a:off x="796625" y="2744297"/>
-            <a:ext cx="190927" cy="190927"/>
-          </a:xfrm>
-          <a:prstGeom prst="roundRect">
-            <a:avLst>
-              <a:gd name="adj" fmla="val 181992"/>
-            </a:avLst>
-          </a:prstGeom>
-          <a:solidFill>
-            <a:srgbClr val="FDE68A">
-              <a:alpha val="80000"/>
-            </a:srgbClr>
-          </a:solidFill>
-          <a:ln w="12700">
-            <a:solidFill>
-              <a:srgbClr val="333333"/>
-            </a:solidFill>
-            <a:prstDash val="solid"/>
-          </a:ln>
-        </p:spPr>
-      </p:sp>
-      <p:sp>
-        <p:nvSpPr>
-          <p:cNvPr id="31" name="Text 29"/>
+          <p:cNvPr id="26" name="Text 24"/>
           <p:cNvSpPr/>
           <p:nvPr/>
         </p:nvSpPr>
@@ -3159,7 +3029,7 @@
       </p:sp>
       <p:sp>
         <p:nvSpPr>
-          <p:cNvPr id="32" name="Text 30"/>
+          <p:cNvPr id="27" name="Text 25"/>
           <p:cNvSpPr/>
           <p:nvPr/>
         </p:nvSpPr>
@@ -3179,9 +3049,6 @@
           <a:lstStyle/>
           <a:p>
             <a:pPr indent="0" marL="0">
-              <a:lnSpc>
-                <a:spcPct val="115000"/>
-              </a:lnSpc>
               <a:buNone/>
             </a:pPr>
             <a:r>
@@ -3201,7 +3068,7 @@
       </p:sp>
       <p:sp>
         <p:nvSpPr>
-          <p:cNvPr id="33" name="Shape 31"/>
+          <p:cNvPr id="28" name="Shape 26"/>
           <p:cNvSpPr/>
           <p:nvPr/>
         </p:nvSpPr>
@@ -3230,7 +3097,7 @@
       </p:sp>
       <p:sp>
         <p:nvSpPr>
-          <p:cNvPr id="34" name="Shape 32"/>
+          <p:cNvPr id="29" name="Shape 27"/>
           <p:cNvSpPr/>
           <p:nvPr/>
         </p:nvSpPr>
@@ -3252,7 +3119,7 @@
       </p:sp>
       <p:sp>
         <p:nvSpPr>
-          <p:cNvPr id="35" name="Shape 33"/>
+          <p:cNvPr id="30" name="Shape 28"/>
           <p:cNvSpPr/>
           <p:nvPr/>
         </p:nvSpPr>
@@ -3286,36 +3153,7 @@
       </p:sp>
       <p:sp>
         <p:nvSpPr>
-          <p:cNvPr id="36" name="Shape 34"/>
-          <p:cNvSpPr/>
-          <p:nvPr/>
-        </p:nvSpPr>
-        <p:spPr>
-          <a:xfrm>
-            <a:off x="796625" y="3366089"/>
-            <a:ext cx="190927" cy="190927"/>
-          </a:xfrm>
-          <a:prstGeom prst="roundRect">
-            <a:avLst>
-              <a:gd name="adj" fmla="val 181992"/>
-            </a:avLst>
-          </a:prstGeom>
-          <a:solidFill>
-            <a:srgbClr val="FDE68A">
-              <a:alpha val="80000"/>
-            </a:srgbClr>
-          </a:solidFill>
-          <a:ln w="12700">
-            <a:solidFill>
-              <a:srgbClr val="333333"/>
-            </a:solidFill>
-            <a:prstDash val="solid"/>
-          </a:ln>
-        </p:spPr>
-      </p:sp>
-      <p:sp>
-        <p:nvSpPr>
-          <p:cNvPr id="37" name="Text 35"/>
+          <p:cNvPr id="31" name="Text 29"/>
           <p:cNvSpPr/>
           <p:nvPr/>
         </p:nvSpPr>
@@ -3354,7 +3192,7 @@
       </p:sp>
       <p:sp>
         <p:nvSpPr>
-          <p:cNvPr id="38" name="Text 36"/>
+          <p:cNvPr id="32" name="Text 30"/>
           <p:cNvSpPr/>
           <p:nvPr/>
         </p:nvSpPr>
@@ -3374,9 +3212,6 @@
           <a:lstStyle/>
           <a:p>
             <a:pPr indent="0" marL="0">
-              <a:lnSpc>
-                <a:spcPct val="115000"/>
-              </a:lnSpc>
               <a:buNone/>
             </a:pPr>
             <a:r>
@@ -3396,7 +3231,7 @@
       </p:sp>
       <p:sp>
         <p:nvSpPr>
-          <p:cNvPr id="39" name="Shape 37"/>
+          <p:cNvPr id="33" name="Shape 31"/>
           <p:cNvSpPr/>
           <p:nvPr/>
         </p:nvSpPr>
@@ -3425,7 +3260,7 @@
       </p:sp>
       <p:sp>
         <p:nvSpPr>
-          <p:cNvPr id="40" name="Shape 38"/>
+          <p:cNvPr id="34" name="Shape 32"/>
           <p:cNvSpPr/>
           <p:nvPr/>
         </p:nvSpPr>
@@ -3447,7 +3282,7 @@
       </p:sp>
       <p:sp>
         <p:nvSpPr>
-          <p:cNvPr id="41" name="Shape 39"/>
+          <p:cNvPr id="35" name="Shape 33"/>
           <p:cNvSpPr/>
           <p:nvPr/>
         </p:nvSpPr>
@@ -3481,36 +3316,7 @@
       </p:sp>
       <p:sp>
         <p:nvSpPr>
-          <p:cNvPr id="42" name="Shape 40"/>
-          <p:cNvSpPr/>
-          <p:nvPr/>
-        </p:nvSpPr>
-        <p:spPr>
-          <a:xfrm>
-            <a:off x="796625" y="3987881"/>
-            <a:ext cx="190927" cy="190927"/>
-          </a:xfrm>
-          <a:prstGeom prst="roundRect">
-            <a:avLst>
-              <a:gd name="adj" fmla="val 181992"/>
-            </a:avLst>
-          </a:prstGeom>
-          <a:solidFill>
-            <a:srgbClr val="FDE68A">
-              <a:alpha val="80000"/>
-            </a:srgbClr>
-          </a:solidFill>
-          <a:ln w="12700">
-            <a:solidFill>
-              <a:srgbClr val="333333"/>
-            </a:solidFill>
-            <a:prstDash val="solid"/>
-          </a:ln>
-        </p:spPr>
-      </p:sp>
-      <p:sp>
-        <p:nvSpPr>
-          <p:cNvPr id="43" name="Text 41"/>
+          <p:cNvPr id="36" name="Text 34"/>
           <p:cNvSpPr/>
           <p:nvPr/>
         </p:nvSpPr>
@@ -3549,7 +3355,7 @@
       </p:sp>
       <p:sp>
         <p:nvSpPr>
-          <p:cNvPr id="44" name="Text 42"/>
+          <p:cNvPr id="37" name="Text 35"/>
           <p:cNvSpPr/>
           <p:nvPr/>
         </p:nvSpPr>
@@ -3569,9 +3375,6 @@
           <a:lstStyle/>
           <a:p>
             <a:pPr indent="0" marL="0">
-              <a:lnSpc>
-                <a:spcPct val="115000"/>
-              </a:lnSpc>
               <a:buNone/>
             </a:pPr>
             <a:r>
@@ -3591,7 +3394,7 @@
       </p:sp>
       <p:sp>
         <p:nvSpPr>
-          <p:cNvPr id="45" name="Shape 43"/>
+          <p:cNvPr id="38" name="Shape 36"/>
           <p:cNvSpPr/>
           <p:nvPr/>
         </p:nvSpPr>
@@ -3611,7 +3414,7 @@
       </p:sp>
       <p:sp>
         <p:nvSpPr>
-          <p:cNvPr id="46" name="Shape 44"/>
+          <p:cNvPr id="39" name="Shape 37"/>
           <p:cNvSpPr/>
           <p:nvPr/>
         </p:nvSpPr>
@@ -3633,7 +3436,7 @@
       </p:sp>
       <p:sp>
         <p:nvSpPr>
-          <p:cNvPr id="47" name="Shape 45"/>
+          <p:cNvPr id="40" name="Shape 38"/>
           <p:cNvSpPr/>
           <p:nvPr/>
         </p:nvSpPr>
@@ -3664,7 +3467,7 @@
       </p:sp>
       <p:sp>
         <p:nvSpPr>
-          <p:cNvPr id="48" name="Text 46"/>
+          <p:cNvPr id="41" name="Text 39"/>
           <p:cNvSpPr/>
           <p:nvPr/>
         </p:nvSpPr>
@@ -3815,55 +3618,6 @@
         </p:nvSpPr>
         <p:spPr>
           <a:xfrm>
-            <a:off x="7909560" y="201168"/>
-            <a:ext cx="685800" cy="685800"/>
-          </a:xfrm>
-          <a:prstGeom prst="ellipse">
-            <a:avLst/>
-          </a:prstGeom>
-          <a:solidFill>
-            <a:srgbClr val="FEF2F2">
-              <a:alpha val="0"/>
-            </a:srgbClr>
-          </a:solidFill>
-          <a:ln w="15875">
-            <a:solidFill>
-              <a:srgbClr val="FDE68A"/>
-            </a:solidFill>
-            <a:prstDash val="solid"/>
-          </a:ln>
-        </p:spPr>
-      </p:sp>
-      <p:sp>
-        <p:nvSpPr>
-          <p:cNvPr id="6" name="Shape 4"/>
-          <p:cNvSpPr/>
-          <p:nvPr/>
-        </p:nvSpPr>
-        <p:spPr>
-          <a:xfrm>
-            <a:off x="8183880" y="384048"/>
-            <a:ext cx="384048" cy="384048"/>
-          </a:xfrm>
-          <a:prstGeom prst="ellipse">
-            <a:avLst/>
-          </a:prstGeom>
-          <a:solidFill>
-            <a:srgbClr val="FDE68A">
-              <a:alpha val="35000"/>
-            </a:srgbClr>
-          </a:solidFill>
-          <a:ln/>
-        </p:spPr>
-      </p:sp>
-      <p:sp>
-        <p:nvSpPr>
-          <p:cNvPr id="7" name="Shape 5"/>
-          <p:cNvSpPr/>
-          <p:nvPr/>
-        </p:nvSpPr>
-        <p:spPr>
-          <a:xfrm>
             <a:off x="109728" y="0"/>
             <a:ext cx="9034272" cy="960120"/>
           </a:xfrm>
@@ -3878,7 +3632,7 @@
       </p:sp>
       <p:sp>
         <p:nvSpPr>
-          <p:cNvPr id="8" name="Shape 6"/>
+          <p:cNvPr id="6" name="Shape 4"/>
           <p:cNvSpPr/>
           <p:nvPr/>
         </p:nvSpPr>
@@ -3900,7 +3654,7 @@
       </p:sp>
       <p:sp>
         <p:nvSpPr>
-          <p:cNvPr id="9" name="Shape 7"/>
+          <p:cNvPr id="7" name="Shape 5"/>
           <p:cNvSpPr/>
           <p:nvPr/>
         </p:nvSpPr>
@@ -3922,7 +3676,7 @@
       </p:sp>
       <p:sp>
         <p:nvSpPr>
-          <p:cNvPr id="10" name="Shape 8"/>
+          <p:cNvPr id="8" name="Shape 6"/>
           <p:cNvSpPr/>
           <p:nvPr/>
         </p:nvSpPr>
@@ -3942,7 +3696,7 @@
       </p:sp>
       <p:sp>
         <p:nvSpPr>
-          <p:cNvPr id="11" name="Shape 9"/>
+          <p:cNvPr id="9" name="Shape 7"/>
           <p:cNvSpPr/>
           <p:nvPr/>
         </p:nvSpPr>
@@ -3973,7 +3727,7 @@
       </p:sp>
       <p:sp>
         <p:nvSpPr>
-          <p:cNvPr id="12" name="Text 10"/>
+          <p:cNvPr id="10" name="Text 8"/>
           <p:cNvSpPr/>
           <p:nvPr/>
         </p:nvSpPr>
@@ -4014,7 +3768,7 @@
       </p:sp>
       <p:sp>
         <p:nvSpPr>
-          <p:cNvPr id="13" name="Text 11"/>
+          <p:cNvPr id="11" name="Text 9"/>
           <p:cNvSpPr/>
           <p:nvPr/>
         </p:nvSpPr>
@@ -4053,7 +3807,7 @@
       </p:sp>
       <p:sp>
         <p:nvSpPr>
-          <p:cNvPr id="14" name="Shape 12"/>
+          <p:cNvPr id="12" name="Shape 10"/>
           <p:cNvSpPr/>
           <p:nvPr/>
         </p:nvSpPr>
@@ -4087,7 +3841,7 @@
       </p:sp>
       <p:sp>
         <p:nvSpPr>
-          <p:cNvPr id="15" name="Shape 13"/>
+          <p:cNvPr id="13" name="Shape 11"/>
           <p:cNvSpPr/>
           <p:nvPr/>
         </p:nvSpPr>
@@ -4116,7 +3870,7 @@
       </p:sp>
       <p:sp>
         <p:nvSpPr>
-          <p:cNvPr id="16" name="Shape 14"/>
+          <p:cNvPr id="14" name="Shape 12"/>
           <p:cNvSpPr/>
           <p:nvPr/>
         </p:nvSpPr>
@@ -4138,7 +3892,7 @@
       </p:sp>
       <p:sp>
         <p:nvSpPr>
-          <p:cNvPr id="17" name="Shape 15"/>
+          <p:cNvPr id="15" name="Shape 13"/>
           <p:cNvSpPr/>
           <p:nvPr/>
         </p:nvSpPr>
@@ -4172,36 +3926,7 @@
       </p:sp>
       <p:sp>
         <p:nvSpPr>
-          <p:cNvPr id="18" name="Shape 16"/>
-          <p:cNvSpPr/>
-          <p:nvPr/>
-        </p:nvSpPr>
-        <p:spPr>
-          <a:xfrm>
-            <a:off x="796625" y="1500713"/>
-            <a:ext cx="190927" cy="190927"/>
-          </a:xfrm>
-          <a:prstGeom prst="roundRect">
-            <a:avLst>
-              <a:gd name="adj" fmla="val 181992"/>
-            </a:avLst>
-          </a:prstGeom>
-          <a:solidFill>
-            <a:srgbClr val="FDE68A">
-              <a:alpha val="80000"/>
-            </a:srgbClr>
-          </a:solidFill>
-          <a:ln w="12700">
-            <a:solidFill>
-              <a:srgbClr val="333333"/>
-            </a:solidFill>
-            <a:prstDash val="solid"/>
-          </a:ln>
-        </p:spPr>
-      </p:sp>
-      <p:sp>
-        <p:nvSpPr>
-          <p:cNvPr id="19" name="Text 17"/>
+          <p:cNvPr id="16" name="Text 14"/>
           <p:cNvSpPr/>
           <p:nvPr/>
         </p:nvSpPr>
@@ -4240,7 +3965,7 @@
       </p:sp>
       <p:sp>
         <p:nvSpPr>
-          <p:cNvPr id="20" name="Text 18"/>
+          <p:cNvPr id="17" name="Text 15"/>
           <p:cNvSpPr/>
           <p:nvPr/>
         </p:nvSpPr>
@@ -4260,9 +3985,6 @@
           <a:lstStyle/>
           <a:p>
             <a:pPr indent="0" marL="0">
-              <a:lnSpc>
-                <a:spcPct val="115000"/>
-              </a:lnSpc>
               <a:buNone/>
             </a:pPr>
             <a:r>
@@ -4282,7 +4004,7 @@
       </p:sp>
       <p:sp>
         <p:nvSpPr>
-          <p:cNvPr id="21" name="Shape 19"/>
+          <p:cNvPr id="18" name="Shape 16"/>
           <p:cNvSpPr/>
           <p:nvPr/>
         </p:nvSpPr>
@@ -4311,7 +4033,7 @@
       </p:sp>
       <p:sp>
         <p:nvSpPr>
-          <p:cNvPr id="22" name="Shape 20"/>
+          <p:cNvPr id="19" name="Shape 17"/>
           <p:cNvSpPr/>
           <p:nvPr/>
         </p:nvSpPr>
@@ -4333,7 +4055,7 @@
       </p:sp>
       <p:sp>
         <p:nvSpPr>
-          <p:cNvPr id="23" name="Shape 21"/>
+          <p:cNvPr id="20" name="Shape 18"/>
           <p:cNvSpPr/>
           <p:nvPr/>
         </p:nvSpPr>
@@ -4367,36 +4089,7 @@
       </p:sp>
       <p:sp>
         <p:nvSpPr>
-          <p:cNvPr id="24" name="Shape 22"/>
-          <p:cNvSpPr/>
-          <p:nvPr/>
-        </p:nvSpPr>
-        <p:spPr>
-          <a:xfrm>
-            <a:off x="796625" y="2122505"/>
-            <a:ext cx="190927" cy="190927"/>
-          </a:xfrm>
-          <a:prstGeom prst="roundRect">
-            <a:avLst>
-              <a:gd name="adj" fmla="val 181992"/>
-            </a:avLst>
-          </a:prstGeom>
-          <a:solidFill>
-            <a:srgbClr val="FDE68A">
-              <a:alpha val="80000"/>
-            </a:srgbClr>
-          </a:solidFill>
-          <a:ln w="12700">
-            <a:solidFill>
-              <a:srgbClr val="333333"/>
-            </a:solidFill>
-            <a:prstDash val="solid"/>
-          </a:ln>
-        </p:spPr>
-      </p:sp>
-      <p:sp>
-        <p:nvSpPr>
-          <p:cNvPr id="25" name="Text 23"/>
+          <p:cNvPr id="21" name="Text 19"/>
           <p:cNvSpPr/>
           <p:nvPr/>
         </p:nvSpPr>
@@ -4435,7 +4128,7 @@
       </p:sp>
       <p:sp>
         <p:nvSpPr>
-          <p:cNvPr id="26" name="Text 24"/>
+          <p:cNvPr id="22" name="Text 20"/>
           <p:cNvSpPr/>
           <p:nvPr/>
         </p:nvSpPr>
@@ -4455,9 +4148,6 @@
           <a:lstStyle/>
           <a:p>
             <a:pPr indent="0" marL="0">
-              <a:lnSpc>
-                <a:spcPct val="115000"/>
-              </a:lnSpc>
               <a:buNone/>
             </a:pPr>
             <a:r>
@@ -4477,7 +4167,7 @@
       </p:sp>
       <p:sp>
         <p:nvSpPr>
-          <p:cNvPr id="27" name="Shape 25"/>
+          <p:cNvPr id="23" name="Shape 21"/>
           <p:cNvSpPr/>
           <p:nvPr/>
         </p:nvSpPr>
@@ -4506,7 +4196,7 @@
       </p:sp>
       <p:sp>
         <p:nvSpPr>
-          <p:cNvPr id="28" name="Shape 26"/>
+          <p:cNvPr id="24" name="Shape 22"/>
           <p:cNvSpPr/>
           <p:nvPr/>
         </p:nvSpPr>
@@ -4528,7 +4218,7 @@
       </p:sp>
       <p:sp>
         <p:nvSpPr>
-          <p:cNvPr id="29" name="Shape 27"/>
+          <p:cNvPr id="25" name="Shape 23"/>
           <p:cNvSpPr/>
           <p:nvPr/>
         </p:nvSpPr>
@@ -4562,36 +4252,7 @@
       </p:sp>
       <p:sp>
         <p:nvSpPr>
-          <p:cNvPr id="30" name="Shape 28"/>
-          <p:cNvSpPr/>
-          <p:nvPr/>
-        </p:nvSpPr>
-        <p:spPr>
-          <a:xfrm>
-            <a:off x="796625" y="2744297"/>
-            <a:ext cx="190927" cy="190927"/>
-          </a:xfrm>
-          <a:prstGeom prst="roundRect">
-            <a:avLst>
-              <a:gd name="adj" fmla="val 181992"/>
-            </a:avLst>
-          </a:prstGeom>
-          <a:solidFill>
-            <a:srgbClr val="FDE68A">
-              <a:alpha val="80000"/>
-            </a:srgbClr>
-          </a:solidFill>
-          <a:ln w="12700">
-            <a:solidFill>
-              <a:srgbClr val="333333"/>
-            </a:solidFill>
-            <a:prstDash val="solid"/>
-          </a:ln>
-        </p:spPr>
-      </p:sp>
-      <p:sp>
-        <p:nvSpPr>
-          <p:cNvPr id="31" name="Text 29"/>
+          <p:cNvPr id="26" name="Text 24"/>
           <p:cNvSpPr/>
           <p:nvPr/>
         </p:nvSpPr>
@@ -4630,7 +4291,7 @@
       </p:sp>
       <p:sp>
         <p:nvSpPr>
-          <p:cNvPr id="32" name="Text 30"/>
+          <p:cNvPr id="27" name="Text 25"/>
           <p:cNvSpPr/>
           <p:nvPr/>
         </p:nvSpPr>
@@ -4650,9 +4311,6 @@
           <a:lstStyle/>
           <a:p>
             <a:pPr indent="0" marL="0">
-              <a:lnSpc>
-                <a:spcPct val="115000"/>
-              </a:lnSpc>
               <a:buNone/>
             </a:pPr>
             <a:r>
@@ -4672,7 +4330,7 @@
       </p:sp>
       <p:sp>
         <p:nvSpPr>
-          <p:cNvPr id="33" name="Shape 31"/>
+          <p:cNvPr id="28" name="Shape 26"/>
           <p:cNvSpPr/>
           <p:nvPr/>
         </p:nvSpPr>
@@ -4701,7 +4359,7 @@
       </p:sp>
       <p:sp>
         <p:nvSpPr>
-          <p:cNvPr id="34" name="Shape 32"/>
+          <p:cNvPr id="29" name="Shape 27"/>
           <p:cNvSpPr/>
           <p:nvPr/>
         </p:nvSpPr>
@@ -4723,7 +4381,7 @@
       </p:sp>
       <p:sp>
         <p:nvSpPr>
-          <p:cNvPr id="35" name="Shape 33"/>
+          <p:cNvPr id="30" name="Shape 28"/>
           <p:cNvSpPr/>
           <p:nvPr/>
         </p:nvSpPr>
@@ -4757,36 +4415,7 @@
       </p:sp>
       <p:sp>
         <p:nvSpPr>
-          <p:cNvPr id="36" name="Shape 34"/>
-          <p:cNvSpPr/>
-          <p:nvPr/>
-        </p:nvSpPr>
-        <p:spPr>
-          <a:xfrm>
-            <a:off x="796625" y="3366089"/>
-            <a:ext cx="190927" cy="190927"/>
-          </a:xfrm>
-          <a:prstGeom prst="roundRect">
-            <a:avLst>
-              <a:gd name="adj" fmla="val 181992"/>
-            </a:avLst>
-          </a:prstGeom>
-          <a:solidFill>
-            <a:srgbClr val="FDE68A">
-              <a:alpha val="80000"/>
-            </a:srgbClr>
-          </a:solidFill>
-          <a:ln w="12700">
-            <a:solidFill>
-              <a:srgbClr val="333333"/>
-            </a:solidFill>
-            <a:prstDash val="solid"/>
-          </a:ln>
-        </p:spPr>
-      </p:sp>
-      <p:sp>
-        <p:nvSpPr>
-          <p:cNvPr id="37" name="Text 35"/>
+          <p:cNvPr id="31" name="Text 29"/>
           <p:cNvSpPr/>
           <p:nvPr/>
         </p:nvSpPr>
@@ -4825,7 +4454,7 @@
       </p:sp>
       <p:sp>
         <p:nvSpPr>
-          <p:cNvPr id="38" name="Text 36"/>
+          <p:cNvPr id="32" name="Text 30"/>
           <p:cNvSpPr/>
           <p:nvPr/>
         </p:nvSpPr>
@@ -4845,9 +4474,6 @@
           <a:lstStyle/>
           <a:p>
             <a:pPr indent="0" marL="0">
-              <a:lnSpc>
-                <a:spcPct val="115000"/>
-              </a:lnSpc>
               <a:buNone/>
             </a:pPr>
             <a:r>
@@ -4867,7 +4493,7 @@
       </p:sp>
       <p:sp>
         <p:nvSpPr>
-          <p:cNvPr id="39" name="Shape 37"/>
+          <p:cNvPr id="33" name="Shape 31"/>
           <p:cNvSpPr/>
           <p:nvPr/>
         </p:nvSpPr>
@@ -4896,7 +4522,7 @@
       </p:sp>
       <p:sp>
         <p:nvSpPr>
-          <p:cNvPr id="40" name="Shape 38"/>
+          <p:cNvPr id="34" name="Shape 32"/>
           <p:cNvSpPr/>
           <p:nvPr/>
         </p:nvSpPr>
@@ -4918,7 +4544,7 @@
       </p:sp>
       <p:sp>
         <p:nvSpPr>
-          <p:cNvPr id="41" name="Shape 39"/>
+          <p:cNvPr id="35" name="Shape 33"/>
           <p:cNvSpPr/>
           <p:nvPr/>
         </p:nvSpPr>
@@ -4952,36 +4578,7 @@
       </p:sp>
       <p:sp>
         <p:nvSpPr>
-          <p:cNvPr id="42" name="Shape 40"/>
-          <p:cNvSpPr/>
-          <p:nvPr/>
-        </p:nvSpPr>
-        <p:spPr>
-          <a:xfrm>
-            <a:off x="796625" y="3987881"/>
-            <a:ext cx="190927" cy="190927"/>
-          </a:xfrm>
-          <a:prstGeom prst="roundRect">
-            <a:avLst>
-              <a:gd name="adj" fmla="val 181992"/>
-            </a:avLst>
-          </a:prstGeom>
-          <a:solidFill>
-            <a:srgbClr val="FDE68A">
-              <a:alpha val="80000"/>
-            </a:srgbClr>
-          </a:solidFill>
-          <a:ln w="12700">
-            <a:solidFill>
-              <a:srgbClr val="333333"/>
-            </a:solidFill>
-            <a:prstDash val="solid"/>
-          </a:ln>
-        </p:spPr>
-      </p:sp>
-      <p:sp>
-        <p:nvSpPr>
-          <p:cNvPr id="43" name="Text 41"/>
+          <p:cNvPr id="36" name="Text 34"/>
           <p:cNvSpPr/>
           <p:nvPr/>
         </p:nvSpPr>
@@ -5020,7 +4617,7 @@
       </p:sp>
       <p:sp>
         <p:nvSpPr>
-          <p:cNvPr id="44" name="Text 42"/>
+          <p:cNvPr id="37" name="Text 35"/>
           <p:cNvSpPr/>
           <p:nvPr/>
         </p:nvSpPr>
@@ -5040,9 +4637,6 @@
           <a:lstStyle/>
           <a:p>
             <a:pPr indent="0" marL="0">
-              <a:lnSpc>
-                <a:spcPct val="115000"/>
-              </a:lnSpc>
               <a:buNone/>
             </a:pPr>
             <a:r>
@@ -5062,7 +4656,7 @@
       </p:sp>
       <p:sp>
         <p:nvSpPr>
-          <p:cNvPr id="45" name="Shape 43"/>
+          <p:cNvPr id="38" name="Shape 36"/>
           <p:cNvSpPr/>
           <p:nvPr/>
         </p:nvSpPr>
@@ -5082,7 +4676,7 @@
       </p:sp>
       <p:sp>
         <p:nvSpPr>
-          <p:cNvPr id="46" name="Shape 44"/>
+          <p:cNvPr id="39" name="Shape 37"/>
           <p:cNvSpPr/>
           <p:nvPr/>
         </p:nvSpPr>
@@ -5104,7 +4698,7 @@
       </p:sp>
       <p:sp>
         <p:nvSpPr>
-          <p:cNvPr id="47" name="Shape 45"/>
+          <p:cNvPr id="40" name="Shape 38"/>
           <p:cNvSpPr/>
           <p:nvPr/>
         </p:nvSpPr>
@@ -5135,7 +4729,7 @@
       </p:sp>
       <p:sp>
         <p:nvSpPr>
-          <p:cNvPr id="48" name="Text 46"/>
+          <p:cNvPr id="41" name="Text 39"/>
           <p:cNvSpPr/>
           <p:nvPr/>
         </p:nvSpPr>
@@ -5286,55 +4880,6 @@
         </p:nvSpPr>
         <p:spPr>
           <a:xfrm>
-            <a:off x="7909560" y="201168"/>
-            <a:ext cx="685800" cy="685800"/>
-          </a:xfrm>
-          <a:prstGeom prst="ellipse">
-            <a:avLst/>
-          </a:prstGeom>
-          <a:solidFill>
-            <a:srgbClr val="FEF2F2">
-              <a:alpha val="0"/>
-            </a:srgbClr>
-          </a:solidFill>
-          <a:ln w="15875">
-            <a:solidFill>
-              <a:srgbClr val="FDE68A"/>
-            </a:solidFill>
-            <a:prstDash val="solid"/>
-          </a:ln>
-        </p:spPr>
-      </p:sp>
-      <p:sp>
-        <p:nvSpPr>
-          <p:cNvPr id="6" name="Shape 4"/>
-          <p:cNvSpPr/>
-          <p:nvPr/>
-        </p:nvSpPr>
-        <p:spPr>
-          <a:xfrm>
-            <a:off x="8183880" y="384048"/>
-            <a:ext cx="384048" cy="384048"/>
-          </a:xfrm>
-          <a:prstGeom prst="ellipse">
-            <a:avLst/>
-          </a:prstGeom>
-          <a:solidFill>
-            <a:srgbClr val="FDE68A">
-              <a:alpha val="35000"/>
-            </a:srgbClr>
-          </a:solidFill>
-          <a:ln/>
-        </p:spPr>
-      </p:sp>
-      <p:sp>
-        <p:nvSpPr>
-          <p:cNvPr id="7" name="Shape 5"/>
-          <p:cNvSpPr/>
-          <p:nvPr/>
-        </p:nvSpPr>
-        <p:spPr>
-          <a:xfrm>
             <a:off x="109728" y="0"/>
             <a:ext cx="9034272" cy="960120"/>
           </a:xfrm>
@@ -5349,7 +4894,7 @@
       </p:sp>
       <p:sp>
         <p:nvSpPr>
-          <p:cNvPr id="8" name="Shape 6"/>
+          <p:cNvPr id="6" name="Shape 4"/>
           <p:cNvSpPr/>
           <p:nvPr/>
         </p:nvSpPr>
@@ -5371,7 +4916,7 @@
       </p:sp>
       <p:sp>
         <p:nvSpPr>
-          <p:cNvPr id="9" name="Shape 7"/>
+          <p:cNvPr id="7" name="Shape 5"/>
           <p:cNvSpPr/>
           <p:nvPr/>
         </p:nvSpPr>
@@ -5393,7 +4938,7 @@
       </p:sp>
       <p:sp>
         <p:nvSpPr>
-          <p:cNvPr id="10" name="Shape 8"/>
+          <p:cNvPr id="8" name="Shape 6"/>
           <p:cNvSpPr/>
           <p:nvPr/>
         </p:nvSpPr>
@@ -5413,7 +4958,7 @@
       </p:sp>
       <p:sp>
         <p:nvSpPr>
-          <p:cNvPr id="11" name="Shape 9"/>
+          <p:cNvPr id="9" name="Shape 7"/>
           <p:cNvSpPr/>
           <p:nvPr/>
         </p:nvSpPr>
@@ -5444,7 +4989,7 @@
       </p:sp>
       <p:sp>
         <p:nvSpPr>
-          <p:cNvPr id="12" name="Text 10"/>
+          <p:cNvPr id="10" name="Text 8"/>
           <p:cNvSpPr/>
           <p:nvPr/>
         </p:nvSpPr>
@@ -5485,7 +5030,7 @@
       </p:sp>
       <p:sp>
         <p:nvSpPr>
-          <p:cNvPr id="13" name="Text 11"/>
+          <p:cNvPr id="11" name="Text 9"/>
           <p:cNvSpPr/>
           <p:nvPr/>
         </p:nvSpPr>
@@ -5524,7 +5069,7 @@
       </p:sp>
       <p:sp>
         <p:nvSpPr>
-          <p:cNvPr id="14" name="Shape 12"/>
+          <p:cNvPr id="12" name="Shape 10"/>
           <p:cNvSpPr/>
           <p:nvPr/>
         </p:nvSpPr>
@@ -5558,7 +5103,7 @@
       </p:sp>
       <p:sp>
         <p:nvSpPr>
-          <p:cNvPr id="15" name="Shape 13"/>
+          <p:cNvPr id="13" name="Shape 11"/>
           <p:cNvSpPr/>
           <p:nvPr/>
         </p:nvSpPr>
@@ -5587,7 +5132,7 @@
       </p:sp>
       <p:sp>
         <p:nvSpPr>
-          <p:cNvPr id="16" name="Shape 14"/>
+          <p:cNvPr id="14" name="Shape 12"/>
           <p:cNvSpPr/>
           <p:nvPr/>
         </p:nvSpPr>
@@ -5609,7 +5154,7 @@
       </p:sp>
       <p:sp>
         <p:nvSpPr>
-          <p:cNvPr id="17" name="Shape 15"/>
+          <p:cNvPr id="15" name="Shape 13"/>
           <p:cNvSpPr/>
           <p:nvPr/>
         </p:nvSpPr>
@@ -5643,36 +5188,7 @@
       </p:sp>
       <p:sp>
         <p:nvSpPr>
-          <p:cNvPr id="18" name="Shape 16"/>
-          <p:cNvSpPr/>
-          <p:nvPr/>
-        </p:nvSpPr>
-        <p:spPr>
-          <a:xfrm>
-            <a:off x="796625" y="1500713"/>
-            <a:ext cx="190927" cy="190927"/>
-          </a:xfrm>
-          <a:prstGeom prst="roundRect">
-            <a:avLst>
-              <a:gd name="adj" fmla="val 181992"/>
-            </a:avLst>
-          </a:prstGeom>
-          <a:solidFill>
-            <a:srgbClr val="FDE68A">
-              <a:alpha val="80000"/>
-            </a:srgbClr>
-          </a:solidFill>
-          <a:ln w="12700">
-            <a:solidFill>
-              <a:srgbClr val="333333"/>
-            </a:solidFill>
-            <a:prstDash val="solid"/>
-          </a:ln>
-        </p:spPr>
-      </p:sp>
-      <p:sp>
-        <p:nvSpPr>
-          <p:cNvPr id="19" name="Text 17"/>
+          <p:cNvPr id="16" name="Text 14"/>
           <p:cNvSpPr/>
           <p:nvPr/>
         </p:nvSpPr>
@@ -5711,7 +5227,7 @@
       </p:sp>
       <p:sp>
         <p:nvSpPr>
-          <p:cNvPr id="20" name="Text 18"/>
+          <p:cNvPr id="17" name="Text 15"/>
           <p:cNvSpPr/>
           <p:nvPr/>
         </p:nvSpPr>
@@ -5731,9 +5247,6 @@
           <a:lstStyle/>
           <a:p>
             <a:pPr indent="0" marL="0">
-              <a:lnSpc>
-                <a:spcPct val="115000"/>
-              </a:lnSpc>
               <a:buNone/>
             </a:pPr>
             <a:r>
@@ -5753,7 +5266,7 @@
       </p:sp>
       <p:sp>
         <p:nvSpPr>
-          <p:cNvPr id="21" name="Shape 19"/>
+          <p:cNvPr id="18" name="Shape 16"/>
           <p:cNvSpPr/>
           <p:nvPr/>
         </p:nvSpPr>
@@ -5782,7 +5295,7 @@
       </p:sp>
       <p:sp>
         <p:nvSpPr>
-          <p:cNvPr id="22" name="Shape 20"/>
+          <p:cNvPr id="19" name="Shape 17"/>
           <p:cNvSpPr/>
           <p:nvPr/>
         </p:nvSpPr>
@@ -5804,7 +5317,7 @@
       </p:sp>
       <p:sp>
         <p:nvSpPr>
-          <p:cNvPr id="23" name="Shape 21"/>
+          <p:cNvPr id="20" name="Shape 18"/>
           <p:cNvSpPr/>
           <p:nvPr/>
         </p:nvSpPr>
@@ -5838,36 +5351,7 @@
       </p:sp>
       <p:sp>
         <p:nvSpPr>
-          <p:cNvPr id="24" name="Shape 22"/>
-          <p:cNvSpPr/>
-          <p:nvPr/>
-        </p:nvSpPr>
-        <p:spPr>
-          <a:xfrm>
-            <a:off x="796625" y="2122505"/>
-            <a:ext cx="190927" cy="190927"/>
-          </a:xfrm>
-          <a:prstGeom prst="roundRect">
-            <a:avLst>
-              <a:gd name="adj" fmla="val 181992"/>
-            </a:avLst>
-          </a:prstGeom>
-          <a:solidFill>
-            <a:srgbClr val="FDE68A">
-              <a:alpha val="80000"/>
-            </a:srgbClr>
-          </a:solidFill>
-          <a:ln w="12700">
-            <a:solidFill>
-              <a:srgbClr val="333333"/>
-            </a:solidFill>
-            <a:prstDash val="solid"/>
-          </a:ln>
-        </p:spPr>
-      </p:sp>
-      <p:sp>
-        <p:nvSpPr>
-          <p:cNvPr id="25" name="Text 23"/>
+          <p:cNvPr id="21" name="Text 19"/>
           <p:cNvSpPr/>
           <p:nvPr/>
         </p:nvSpPr>
@@ -5906,7 +5390,7 @@
       </p:sp>
       <p:sp>
         <p:nvSpPr>
-          <p:cNvPr id="26" name="Text 24"/>
+          <p:cNvPr id="22" name="Text 20"/>
           <p:cNvSpPr/>
           <p:nvPr/>
         </p:nvSpPr>
@@ -5926,9 +5410,6 @@
           <a:lstStyle/>
           <a:p>
             <a:pPr indent="0" marL="0">
-              <a:lnSpc>
-                <a:spcPct val="115000"/>
-              </a:lnSpc>
               <a:buNone/>
             </a:pPr>
             <a:r>
@@ -5948,7 +5429,7 @@
       </p:sp>
       <p:sp>
         <p:nvSpPr>
-          <p:cNvPr id="27" name="Shape 25"/>
+          <p:cNvPr id="23" name="Shape 21"/>
           <p:cNvSpPr/>
           <p:nvPr/>
         </p:nvSpPr>
@@ -5977,7 +5458,7 @@
       </p:sp>
       <p:sp>
         <p:nvSpPr>
-          <p:cNvPr id="28" name="Shape 26"/>
+          <p:cNvPr id="24" name="Shape 22"/>
           <p:cNvSpPr/>
           <p:nvPr/>
         </p:nvSpPr>
@@ -5999,7 +5480,7 @@
       </p:sp>
       <p:sp>
         <p:nvSpPr>
-          <p:cNvPr id="29" name="Shape 27"/>
+          <p:cNvPr id="25" name="Shape 23"/>
           <p:cNvSpPr/>
           <p:nvPr/>
         </p:nvSpPr>
@@ -6033,36 +5514,7 @@
       </p:sp>
       <p:sp>
         <p:nvSpPr>
-          <p:cNvPr id="30" name="Shape 28"/>
-          <p:cNvSpPr/>
-          <p:nvPr/>
-        </p:nvSpPr>
-        <p:spPr>
-          <a:xfrm>
-            <a:off x="796625" y="2744297"/>
-            <a:ext cx="190927" cy="190927"/>
-          </a:xfrm>
-          <a:prstGeom prst="roundRect">
-            <a:avLst>
-              <a:gd name="adj" fmla="val 181992"/>
-            </a:avLst>
-          </a:prstGeom>
-          <a:solidFill>
-            <a:srgbClr val="FDE68A">
-              <a:alpha val="80000"/>
-            </a:srgbClr>
-          </a:solidFill>
-          <a:ln w="12700">
-            <a:solidFill>
-              <a:srgbClr val="333333"/>
-            </a:solidFill>
-            <a:prstDash val="solid"/>
-          </a:ln>
-        </p:spPr>
-      </p:sp>
-      <p:sp>
-        <p:nvSpPr>
-          <p:cNvPr id="31" name="Text 29"/>
+          <p:cNvPr id="26" name="Text 24"/>
           <p:cNvSpPr/>
           <p:nvPr/>
         </p:nvSpPr>
@@ -6101,7 +5553,7 @@
       </p:sp>
       <p:sp>
         <p:nvSpPr>
-          <p:cNvPr id="32" name="Text 30"/>
+          <p:cNvPr id="27" name="Text 25"/>
           <p:cNvSpPr/>
           <p:nvPr/>
         </p:nvSpPr>
@@ -6121,9 +5573,6 @@
           <a:lstStyle/>
           <a:p>
             <a:pPr indent="0" marL="0">
-              <a:lnSpc>
-                <a:spcPct val="115000"/>
-              </a:lnSpc>
               <a:buNone/>
             </a:pPr>
             <a:r>
@@ -6143,7 +5592,7 @@
       </p:sp>
       <p:sp>
         <p:nvSpPr>
-          <p:cNvPr id="33" name="Shape 31"/>
+          <p:cNvPr id="28" name="Shape 26"/>
           <p:cNvSpPr/>
           <p:nvPr/>
         </p:nvSpPr>
@@ -6172,7 +5621,7 @@
       </p:sp>
       <p:sp>
         <p:nvSpPr>
-          <p:cNvPr id="34" name="Shape 32"/>
+          <p:cNvPr id="29" name="Shape 27"/>
           <p:cNvSpPr/>
           <p:nvPr/>
         </p:nvSpPr>
@@ -6194,7 +5643,7 @@
       </p:sp>
       <p:sp>
         <p:nvSpPr>
-          <p:cNvPr id="35" name="Shape 33"/>
+          <p:cNvPr id="30" name="Shape 28"/>
           <p:cNvSpPr/>
           <p:nvPr/>
         </p:nvSpPr>
@@ -6228,36 +5677,7 @@
       </p:sp>
       <p:sp>
         <p:nvSpPr>
-          <p:cNvPr id="36" name="Shape 34"/>
-          <p:cNvSpPr/>
-          <p:nvPr/>
-        </p:nvSpPr>
-        <p:spPr>
-          <a:xfrm>
-            <a:off x="796625" y="3366089"/>
-            <a:ext cx="190927" cy="190927"/>
-          </a:xfrm>
-          <a:prstGeom prst="roundRect">
-            <a:avLst>
-              <a:gd name="adj" fmla="val 181992"/>
-            </a:avLst>
-          </a:prstGeom>
-          <a:solidFill>
-            <a:srgbClr val="FDE68A">
-              <a:alpha val="80000"/>
-            </a:srgbClr>
-          </a:solidFill>
-          <a:ln w="12700">
-            <a:solidFill>
-              <a:srgbClr val="333333"/>
-            </a:solidFill>
-            <a:prstDash val="solid"/>
-          </a:ln>
-        </p:spPr>
-      </p:sp>
-      <p:sp>
-        <p:nvSpPr>
-          <p:cNvPr id="37" name="Text 35"/>
+          <p:cNvPr id="31" name="Text 29"/>
           <p:cNvSpPr/>
           <p:nvPr/>
         </p:nvSpPr>
@@ -6296,7 +5716,7 @@
       </p:sp>
       <p:sp>
         <p:nvSpPr>
-          <p:cNvPr id="38" name="Text 36"/>
+          <p:cNvPr id="32" name="Text 30"/>
           <p:cNvSpPr/>
           <p:nvPr/>
         </p:nvSpPr>
@@ -6316,9 +5736,6 @@
           <a:lstStyle/>
           <a:p>
             <a:pPr indent="0" marL="0">
-              <a:lnSpc>
-                <a:spcPct val="115000"/>
-              </a:lnSpc>
               <a:buNone/>
             </a:pPr>
             <a:r>
@@ -6338,7 +5755,7 @@
       </p:sp>
       <p:sp>
         <p:nvSpPr>
-          <p:cNvPr id="39" name="Shape 37"/>
+          <p:cNvPr id="33" name="Shape 31"/>
           <p:cNvSpPr/>
           <p:nvPr/>
         </p:nvSpPr>
@@ -6367,7 +5784,7 @@
       </p:sp>
       <p:sp>
         <p:nvSpPr>
-          <p:cNvPr id="40" name="Shape 38"/>
+          <p:cNvPr id="34" name="Shape 32"/>
           <p:cNvSpPr/>
           <p:nvPr/>
         </p:nvSpPr>
@@ -6389,7 +5806,7 @@
       </p:sp>
       <p:sp>
         <p:nvSpPr>
-          <p:cNvPr id="41" name="Shape 39"/>
+          <p:cNvPr id="35" name="Shape 33"/>
           <p:cNvSpPr/>
           <p:nvPr/>
         </p:nvSpPr>
@@ -6423,36 +5840,7 @@
       </p:sp>
       <p:sp>
         <p:nvSpPr>
-          <p:cNvPr id="42" name="Shape 40"/>
-          <p:cNvSpPr/>
-          <p:nvPr/>
-        </p:nvSpPr>
-        <p:spPr>
-          <a:xfrm>
-            <a:off x="796625" y="3987881"/>
-            <a:ext cx="190927" cy="190927"/>
-          </a:xfrm>
-          <a:prstGeom prst="roundRect">
-            <a:avLst>
-              <a:gd name="adj" fmla="val 181992"/>
-            </a:avLst>
-          </a:prstGeom>
-          <a:solidFill>
-            <a:srgbClr val="FDE68A">
-              <a:alpha val="80000"/>
-            </a:srgbClr>
-          </a:solidFill>
-          <a:ln w="12700">
-            <a:solidFill>
-              <a:srgbClr val="333333"/>
-            </a:solidFill>
-            <a:prstDash val="solid"/>
-          </a:ln>
-        </p:spPr>
-      </p:sp>
-      <p:sp>
-        <p:nvSpPr>
-          <p:cNvPr id="43" name="Text 41"/>
+          <p:cNvPr id="36" name="Text 34"/>
           <p:cNvSpPr/>
           <p:nvPr/>
         </p:nvSpPr>
@@ -6491,7 +5879,7 @@
       </p:sp>
       <p:sp>
         <p:nvSpPr>
-          <p:cNvPr id="44" name="Text 42"/>
+          <p:cNvPr id="37" name="Text 35"/>
           <p:cNvSpPr/>
           <p:nvPr/>
         </p:nvSpPr>
@@ -6511,9 +5899,6 @@
           <a:lstStyle/>
           <a:p>
             <a:pPr indent="0" marL="0">
-              <a:lnSpc>
-                <a:spcPct val="115000"/>
-              </a:lnSpc>
               <a:buNone/>
             </a:pPr>
             <a:r>
@@ -6533,7 +5918,7 @@
       </p:sp>
       <p:sp>
         <p:nvSpPr>
-          <p:cNvPr id="45" name="Shape 43"/>
+          <p:cNvPr id="38" name="Shape 36"/>
           <p:cNvSpPr/>
           <p:nvPr/>
         </p:nvSpPr>
@@ -6553,7 +5938,7 @@
       </p:sp>
       <p:sp>
         <p:nvSpPr>
-          <p:cNvPr id="46" name="Shape 44"/>
+          <p:cNvPr id="39" name="Shape 37"/>
           <p:cNvSpPr/>
           <p:nvPr/>
         </p:nvSpPr>
@@ -6575,7 +5960,7 @@
       </p:sp>
       <p:sp>
         <p:nvSpPr>
-          <p:cNvPr id="47" name="Shape 45"/>
+          <p:cNvPr id="40" name="Shape 38"/>
           <p:cNvSpPr/>
           <p:nvPr/>
         </p:nvSpPr>
@@ -6606,7 +5991,7 @@
       </p:sp>
       <p:sp>
         <p:nvSpPr>
-          <p:cNvPr id="48" name="Text 46"/>
+          <p:cNvPr id="41" name="Text 39"/>
           <p:cNvSpPr/>
           <p:nvPr/>
         </p:nvSpPr>
@@ -6683,50 +6068,8 @@
         </p:nvSpPr>
         <p:spPr>
           <a:xfrm>
-            <a:off x="0" y="0"/>
-            <a:ext cx="109728" cy="5143500"/>
-          </a:xfrm>
-          <a:prstGeom prst="rect">
-            <a:avLst/>
-          </a:prstGeom>
-          <a:solidFill>
-            <a:srgbClr val="FDE68A"/>
-          </a:solidFill>
-          <a:ln/>
-        </p:spPr>
-      </p:sp>
-      <p:sp>
-        <p:nvSpPr>
-          <p:cNvPr id="3" name="Shape 1"/>
-          <p:cNvSpPr/>
-          <p:nvPr/>
-        </p:nvSpPr>
-        <p:spPr>
-          <a:xfrm>
-            <a:off x="0" y="4709160"/>
-            <a:ext cx="9144000" cy="429768"/>
-          </a:xfrm>
-          <a:prstGeom prst="rect">
-            <a:avLst/>
-          </a:prstGeom>
-          <a:solidFill>
-            <a:srgbClr val="FDE68A">
-              <a:alpha val="60000"/>
-            </a:srgbClr>
-          </a:solidFill>
-          <a:ln/>
-        </p:spPr>
-      </p:sp>
-      <p:sp>
-        <p:nvSpPr>
-          <p:cNvPr id="4" name="Shape 2"/>
-          <p:cNvSpPr/>
-          <p:nvPr/>
-        </p:nvSpPr>
-        <p:spPr>
-          <a:xfrm>
-            <a:off x="7818120" y="320040"/>
-            <a:ext cx="777240" cy="777240"/>
+            <a:off x="3200400" y="457200"/>
+            <a:ext cx="2743200" cy="2743200"/>
           </a:xfrm>
           <a:prstGeom prst="ellipse">
             <a:avLst/>
@@ -6736,7 +6079,7 @@
               <a:alpha val="0"/>
             </a:srgbClr>
           </a:solidFill>
-          <a:ln w="19050">
+          <a:ln w="25400">
             <a:solidFill>
               <a:srgbClr val="FDE68A"/>
             </a:solidFill>
@@ -6746,14 +6089,14 @@
       </p:sp>
       <p:sp>
         <p:nvSpPr>
-          <p:cNvPr id="5" name="Text 3"/>
-          <p:cNvSpPr/>
-          <p:nvPr/>
-        </p:nvSpPr>
-        <p:spPr>
-          <a:xfrm>
-            <a:off x="502920" y="1965960"/>
-            <a:ext cx="8046720" cy="1097280"/>
+          <p:cNvPr id="3" name="Text 1"/>
+          <p:cNvSpPr/>
+          <p:nvPr/>
+        </p:nvSpPr>
+        <p:spPr>
+          <a:xfrm>
+            <a:off x="731520" y="1828800"/>
+            <a:ext cx="7680960" cy="1188720"/>
           </a:xfrm>
           <a:prstGeom prst="rect">
             <a:avLst/>
@@ -6769,7 +6112,7 @@
               <a:buNone/>
             </a:pPr>
             <a:r>
-              <a:rPr lang="en-US" sz="3600" b="1" dirty="0">
+              <a:rPr lang="en-US" sz="3800" b="1" dirty="0">
                 <a:solidFill>
                   <a:srgbClr val="FFFFFF"/>
                 </a:solidFill>
@@ -6779,7 +6122,7 @@
               </a:rPr>
               <a:t>CC_SECTION_TITLE</a:t>
             </a:r>
-            <a:endParaRPr lang="en-US" sz="3600" dirty="0"/>
+            <a:endParaRPr lang="en-US" sz="3800" dirty="0"/>
           </a:p>
         </p:txBody>
       </p:sp>
@@ -6823,8 +6166,8 @@
         </p:nvSpPr>
         <p:spPr>
           <a:xfrm>
-            <a:off x="0" y="0"/>
-            <a:ext cx="109728" cy="5143500"/>
+            <a:off x="1828800" y="1691640"/>
+            <a:ext cx="5486400" cy="36576"/>
           </a:xfrm>
           <a:prstGeom prst="rect">
             <a:avLst/>
@@ -6837,14 +6180,34 @@
       </p:sp>
       <p:sp>
         <p:nvSpPr>
-          <p:cNvPr id="3" name="Text 1"/>
-          <p:cNvSpPr/>
-          <p:nvPr/>
-        </p:nvSpPr>
-        <p:spPr>
-          <a:xfrm>
-            <a:off x="502920" y="1874520"/>
-            <a:ext cx="8046720" cy="1005840"/>
+          <p:cNvPr id="3" name="Shape 1"/>
+          <p:cNvSpPr/>
+          <p:nvPr/>
+        </p:nvSpPr>
+        <p:spPr>
+          <a:xfrm>
+            <a:off x="1828800" y="3429000"/>
+            <a:ext cx="5486400" cy="36576"/>
+          </a:xfrm>
+          <a:prstGeom prst="rect">
+            <a:avLst/>
+          </a:prstGeom>
+          <a:solidFill>
+            <a:srgbClr val="FDE68A"/>
+          </a:solidFill>
+          <a:ln/>
+        </p:spPr>
+      </p:sp>
+      <p:sp>
+        <p:nvSpPr>
+          <p:cNvPr id="4" name="Text 2"/>
+          <p:cNvSpPr/>
+          <p:nvPr/>
+        </p:nvSpPr>
+        <p:spPr>
+          <a:xfrm>
+            <a:off x="731520" y="1874520"/>
+            <a:ext cx="7680960" cy="1005840"/>
           </a:xfrm>
           <a:prstGeom prst="rect">
             <a:avLst/>
@@ -6876,14 +6239,14 @@
       </p:sp>
       <p:sp>
         <p:nvSpPr>
-          <p:cNvPr id="4" name="Text 2"/>
-          <p:cNvSpPr/>
-          <p:nvPr/>
-        </p:nvSpPr>
-        <p:spPr>
-          <a:xfrm>
-            <a:off x="502920" y="3063240"/>
-            <a:ext cx="8046720" cy="502920"/>
+          <p:cNvPr id="5" name="Text 3"/>
+          <p:cNvSpPr/>
+          <p:nvPr/>
+        </p:nvSpPr>
+        <p:spPr>
+          <a:xfrm>
+            <a:off x="731520" y="3063240"/>
+            <a:ext cx="7680960" cy="502920"/>
           </a:xfrm>
           <a:prstGeom prst="rect">
             <a:avLst/>
@@ -6953,50 +6316,8 @@
         </p:nvSpPr>
         <p:spPr>
           <a:xfrm>
-            <a:off x="0" y="0"/>
-            <a:ext cx="109728" cy="5143500"/>
-          </a:xfrm>
-          <a:prstGeom prst="rect">
-            <a:avLst/>
-          </a:prstGeom>
-          <a:solidFill>
-            <a:srgbClr val="FDE68A"/>
-          </a:solidFill>
-          <a:ln/>
-        </p:spPr>
-      </p:sp>
-      <p:sp>
-        <p:nvSpPr>
-          <p:cNvPr id="3" name="Shape 1"/>
-          <p:cNvSpPr/>
-          <p:nvPr/>
-        </p:nvSpPr>
-        <p:spPr>
-          <a:xfrm>
-            <a:off x="0" y="4709160"/>
-            <a:ext cx="9144000" cy="429768"/>
-          </a:xfrm>
-          <a:prstGeom prst="rect">
-            <a:avLst/>
-          </a:prstGeom>
-          <a:solidFill>
-            <a:srgbClr val="FDE68A">
-              <a:alpha val="60000"/>
-            </a:srgbClr>
-          </a:solidFill>
-          <a:ln/>
-        </p:spPr>
-      </p:sp>
-      <p:sp>
-        <p:nvSpPr>
-          <p:cNvPr id="4" name="Shape 2"/>
-          <p:cNvSpPr/>
-          <p:nvPr/>
-        </p:nvSpPr>
-        <p:spPr>
-          <a:xfrm>
-            <a:off x="7818120" y="320040"/>
-            <a:ext cx="777240" cy="777240"/>
+            <a:off x="3200400" y="457200"/>
+            <a:ext cx="2743200" cy="2743200"/>
           </a:xfrm>
           <a:prstGeom prst="ellipse">
             <a:avLst/>
@@ -7006,7 +6327,7 @@
               <a:alpha val="0"/>
             </a:srgbClr>
           </a:solidFill>
-          <a:ln w="19050">
+          <a:ln w="25400">
             <a:solidFill>
               <a:srgbClr val="FDE68A"/>
             </a:solidFill>
@@ -7016,14 +6337,14 @@
       </p:sp>
       <p:sp>
         <p:nvSpPr>
-          <p:cNvPr id="5" name="Text 3"/>
-          <p:cNvSpPr/>
-          <p:nvPr/>
-        </p:nvSpPr>
-        <p:spPr>
-          <a:xfrm>
-            <a:off x="502920" y="1965960"/>
-            <a:ext cx="8046720" cy="1097280"/>
+          <p:cNvPr id="3" name="Text 1"/>
+          <p:cNvSpPr/>
+          <p:nvPr/>
+        </p:nvSpPr>
+        <p:spPr>
+          <a:xfrm>
+            <a:off x="731520" y="1828800"/>
+            <a:ext cx="7680960" cy="1188720"/>
           </a:xfrm>
           <a:prstGeom prst="rect">
             <a:avLst/>
@@ -7039,7 +6360,7 @@
               <a:buNone/>
             </a:pPr>
             <a:r>
-              <a:rPr lang="en-US" sz="3600" b="1" dirty="0">
+              <a:rPr lang="en-US" sz="3800" b="1" dirty="0">
                 <a:solidFill>
                   <a:srgbClr val="FFFFFF"/>
                 </a:solidFill>
@@ -7049,7 +6370,7 @@
               </a:rPr>
               <a:t>CC_SECTION_TITLE</a:t>
             </a:r>
-            <a:endParaRPr lang="en-US" sz="3600" dirty="0"/>
+            <a:endParaRPr lang="en-US" sz="3800" dirty="0"/>
           </a:p>
         </p:txBody>
       </p:sp>
@@ -7167,55 +6488,6 @@
         </p:nvSpPr>
         <p:spPr>
           <a:xfrm>
-            <a:off x="7909560" y="201168"/>
-            <a:ext cx="685800" cy="685800"/>
-          </a:xfrm>
-          <a:prstGeom prst="ellipse">
-            <a:avLst/>
-          </a:prstGeom>
-          <a:solidFill>
-            <a:srgbClr val="FEF2F2">
-              <a:alpha val="0"/>
-            </a:srgbClr>
-          </a:solidFill>
-          <a:ln w="15875">
-            <a:solidFill>
-              <a:srgbClr val="FDE68A"/>
-            </a:solidFill>
-            <a:prstDash val="solid"/>
-          </a:ln>
-        </p:spPr>
-      </p:sp>
-      <p:sp>
-        <p:nvSpPr>
-          <p:cNvPr id="6" name="Shape 4"/>
-          <p:cNvSpPr/>
-          <p:nvPr/>
-        </p:nvSpPr>
-        <p:spPr>
-          <a:xfrm>
-            <a:off x="8183880" y="384048"/>
-            <a:ext cx="384048" cy="384048"/>
-          </a:xfrm>
-          <a:prstGeom prst="ellipse">
-            <a:avLst/>
-          </a:prstGeom>
-          <a:solidFill>
-            <a:srgbClr val="FDE68A">
-              <a:alpha val="35000"/>
-            </a:srgbClr>
-          </a:solidFill>
-          <a:ln/>
-        </p:spPr>
-      </p:sp>
-      <p:sp>
-        <p:nvSpPr>
-          <p:cNvPr id="7" name="Shape 5"/>
-          <p:cNvSpPr/>
-          <p:nvPr/>
-        </p:nvSpPr>
-        <p:spPr>
-          <a:xfrm>
             <a:off x="109728" y="0"/>
             <a:ext cx="9034272" cy="960120"/>
           </a:xfrm>
@@ -7230,7 +6502,7 @@
       </p:sp>
       <p:sp>
         <p:nvSpPr>
-          <p:cNvPr id="8" name="Shape 6"/>
+          <p:cNvPr id="6" name="Shape 4"/>
           <p:cNvSpPr/>
           <p:nvPr/>
         </p:nvSpPr>
@@ -7252,7 +6524,7 @@
       </p:sp>
       <p:sp>
         <p:nvSpPr>
-          <p:cNvPr id="9" name="Shape 7"/>
+          <p:cNvPr id="7" name="Shape 5"/>
           <p:cNvSpPr/>
           <p:nvPr/>
         </p:nvSpPr>
@@ -7274,7 +6546,7 @@
       </p:sp>
       <p:sp>
         <p:nvSpPr>
-          <p:cNvPr id="10" name="Shape 8"/>
+          <p:cNvPr id="8" name="Shape 6"/>
           <p:cNvSpPr/>
           <p:nvPr/>
         </p:nvSpPr>
@@ -7294,7 +6566,7 @@
       </p:sp>
       <p:sp>
         <p:nvSpPr>
-          <p:cNvPr id="11" name="Shape 9"/>
+          <p:cNvPr id="9" name="Shape 7"/>
           <p:cNvSpPr/>
           <p:nvPr/>
         </p:nvSpPr>
@@ -7325,7 +6597,7 @@
       </p:sp>
       <p:sp>
         <p:nvSpPr>
-          <p:cNvPr id="12" name="Text 10"/>
+          <p:cNvPr id="10" name="Text 8"/>
           <p:cNvSpPr/>
           <p:nvPr/>
         </p:nvSpPr>
@@ -7366,7 +6638,7 @@
       </p:sp>
       <p:sp>
         <p:nvSpPr>
-          <p:cNvPr id="13" name="Text 11"/>
+          <p:cNvPr id="11" name="Text 9"/>
           <p:cNvSpPr/>
           <p:nvPr/>
         </p:nvSpPr>
@@ -7405,7 +6677,7 @@
       </p:sp>
       <p:sp>
         <p:nvSpPr>
-          <p:cNvPr id="14" name="Shape 12"/>
+          <p:cNvPr id="12" name="Shape 10"/>
           <p:cNvSpPr/>
           <p:nvPr/>
         </p:nvSpPr>
@@ -7439,7 +6711,7 @@
       </p:sp>
       <p:sp>
         <p:nvSpPr>
-          <p:cNvPr id="15" name="Shape 13"/>
+          <p:cNvPr id="13" name="Shape 11"/>
           <p:cNvSpPr/>
           <p:nvPr/>
         </p:nvSpPr>
@@ -7468,7 +6740,7 @@
       </p:sp>
       <p:sp>
         <p:nvSpPr>
-          <p:cNvPr id="16" name="Shape 14"/>
+          <p:cNvPr id="14" name="Shape 12"/>
           <p:cNvSpPr/>
           <p:nvPr/>
         </p:nvSpPr>
@@ -7490,7 +6762,7 @@
       </p:sp>
       <p:sp>
         <p:nvSpPr>
-          <p:cNvPr id="17" name="Shape 15"/>
+          <p:cNvPr id="15" name="Shape 13"/>
           <p:cNvSpPr/>
           <p:nvPr/>
         </p:nvSpPr>
@@ -7524,36 +6796,7 @@
       </p:sp>
       <p:sp>
         <p:nvSpPr>
-          <p:cNvPr id="18" name="Shape 16"/>
-          <p:cNvSpPr/>
-          <p:nvPr/>
-        </p:nvSpPr>
-        <p:spPr>
-          <a:xfrm>
-            <a:off x="796625" y="1500713"/>
-            <a:ext cx="190927" cy="190927"/>
-          </a:xfrm>
-          <a:prstGeom prst="roundRect">
-            <a:avLst>
-              <a:gd name="adj" fmla="val 181992"/>
-            </a:avLst>
-          </a:prstGeom>
-          <a:solidFill>
-            <a:srgbClr val="FDE68A">
-              <a:alpha val="80000"/>
-            </a:srgbClr>
-          </a:solidFill>
-          <a:ln w="12700">
-            <a:solidFill>
-              <a:srgbClr val="333333"/>
-            </a:solidFill>
-            <a:prstDash val="solid"/>
-          </a:ln>
-        </p:spPr>
-      </p:sp>
-      <p:sp>
-        <p:nvSpPr>
-          <p:cNvPr id="19" name="Text 17"/>
+          <p:cNvPr id="16" name="Text 14"/>
           <p:cNvSpPr/>
           <p:nvPr/>
         </p:nvSpPr>
@@ -7592,7 +6835,7 @@
       </p:sp>
       <p:sp>
         <p:nvSpPr>
-          <p:cNvPr id="20" name="Text 18"/>
+          <p:cNvPr id="17" name="Text 15"/>
           <p:cNvSpPr/>
           <p:nvPr/>
         </p:nvSpPr>
@@ -7612,9 +6855,6 @@
           <a:lstStyle/>
           <a:p>
             <a:pPr indent="0" marL="0">
-              <a:lnSpc>
-                <a:spcPct val="115000"/>
-              </a:lnSpc>
               <a:buNone/>
             </a:pPr>
             <a:r>
@@ -7634,7 +6874,7 @@
       </p:sp>
       <p:sp>
         <p:nvSpPr>
-          <p:cNvPr id="21" name="Shape 19"/>
+          <p:cNvPr id="18" name="Shape 16"/>
           <p:cNvSpPr/>
           <p:nvPr/>
         </p:nvSpPr>
@@ -7663,7 +6903,7 @@
       </p:sp>
       <p:sp>
         <p:nvSpPr>
-          <p:cNvPr id="22" name="Shape 20"/>
+          <p:cNvPr id="19" name="Shape 17"/>
           <p:cNvSpPr/>
           <p:nvPr/>
         </p:nvSpPr>
@@ -7685,7 +6925,7 @@
       </p:sp>
       <p:sp>
         <p:nvSpPr>
-          <p:cNvPr id="23" name="Shape 21"/>
+          <p:cNvPr id="20" name="Shape 18"/>
           <p:cNvSpPr/>
           <p:nvPr/>
         </p:nvSpPr>
@@ -7719,36 +6959,7 @@
       </p:sp>
       <p:sp>
         <p:nvSpPr>
-          <p:cNvPr id="24" name="Shape 22"/>
-          <p:cNvSpPr/>
-          <p:nvPr/>
-        </p:nvSpPr>
-        <p:spPr>
-          <a:xfrm>
-            <a:off x="796625" y="2122505"/>
-            <a:ext cx="190927" cy="190927"/>
-          </a:xfrm>
-          <a:prstGeom prst="roundRect">
-            <a:avLst>
-              <a:gd name="adj" fmla="val 181992"/>
-            </a:avLst>
-          </a:prstGeom>
-          <a:solidFill>
-            <a:srgbClr val="FDE68A">
-              <a:alpha val="80000"/>
-            </a:srgbClr>
-          </a:solidFill>
-          <a:ln w="12700">
-            <a:solidFill>
-              <a:srgbClr val="333333"/>
-            </a:solidFill>
-            <a:prstDash val="solid"/>
-          </a:ln>
-        </p:spPr>
-      </p:sp>
-      <p:sp>
-        <p:nvSpPr>
-          <p:cNvPr id="25" name="Text 23"/>
+          <p:cNvPr id="21" name="Text 19"/>
           <p:cNvSpPr/>
           <p:nvPr/>
         </p:nvSpPr>
@@ -7787,7 +6998,7 @@
       </p:sp>
       <p:sp>
         <p:nvSpPr>
-          <p:cNvPr id="26" name="Text 24"/>
+          <p:cNvPr id="22" name="Text 20"/>
           <p:cNvSpPr/>
           <p:nvPr/>
         </p:nvSpPr>
@@ -7807,9 +7018,6 @@
           <a:lstStyle/>
           <a:p>
             <a:pPr indent="0" marL="0">
-              <a:lnSpc>
-                <a:spcPct val="115000"/>
-              </a:lnSpc>
               <a:buNone/>
             </a:pPr>
             <a:r>
@@ -7829,7 +7037,7 @@
       </p:sp>
       <p:sp>
         <p:nvSpPr>
-          <p:cNvPr id="27" name="Shape 25"/>
+          <p:cNvPr id="23" name="Shape 21"/>
           <p:cNvSpPr/>
           <p:nvPr/>
         </p:nvSpPr>
@@ -7858,7 +7066,7 @@
       </p:sp>
       <p:sp>
         <p:nvSpPr>
-          <p:cNvPr id="28" name="Shape 26"/>
+          <p:cNvPr id="24" name="Shape 22"/>
           <p:cNvSpPr/>
           <p:nvPr/>
         </p:nvSpPr>
@@ -7880,7 +7088,7 @@
       </p:sp>
       <p:sp>
         <p:nvSpPr>
-          <p:cNvPr id="29" name="Shape 27"/>
+          <p:cNvPr id="25" name="Shape 23"/>
           <p:cNvSpPr/>
           <p:nvPr/>
         </p:nvSpPr>
@@ -7914,36 +7122,7 @@
       </p:sp>
       <p:sp>
         <p:nvSpPr>
-          <p:cNvPr id="30" name="Shape 28"/>
-          <p:cNvSpPr/>
-          <p:nvPr/>
-        </p:nvSpPr>
-        <p:spPr>
-          <a:xfrm>
-            <a:off x="796625" y="2744297"/>
-            <a:ext cx="190927" cy="190927"/>
-          </a:xfrm>
-          <a:prstGeom prst="roundRect">
-            <a:avLst>
-              <a:gd name="adj" fmla="val 181992"/>
-            </a:avLst>
-          </a:prstGeom>
-          <a:solidFill>
-            <a:srgbClr val="FDE68A">
-              <a:alpha val="80000"/>
-            </a:srgbClr>
-          </a:solidFill>
-          <a:ln w="12700">
-            <a:solidFill>
-              <a:srgbClr val="333333"/>
-            </a:solidFill>
-            <a:prstDash val="solid"/>
-          </a:ln>
-        </p:spPr>
-      </p:sp>
-      <p:sp>
-        <p:nvSpPr>
-          <p:cNvPr id="31" name="Text 29"/>
+          <p:cNvPr id="26" name="Text 24"/>
           <p:cNvSpPr/>
           <p:nvPr/>
         </p:nvSpPr>
@@ -7982,7 +7161,7 @@
       </p:sp>
       <p:sp>
         <p:nvSpPr>
-          <p:cNvPr id="32" name="Text 30"/>
+          <p:cNvPr id="27" name="Text 25"/>
           <p:cNvSpPr/>
           <p:nvPr/>
         </p:nvSpPr>
@@ -8002,9 +7181,6 @@
           <a:lstStyle/>
           <a:p>
             <a:pPr indent="0" marL="0">
-              <a:lnSpc>
-                <a:spcPct val="115000"/>
-              </a:lnSpc>
               <a:buNone/>
             </a:pPr>
             <a:r>
@@ -8024,7 +7200,7 @@
       </p:sp>
       <p:sp>
         <p:nvSpPr>
-          <p:cNvPr id="33" name="Shape 31"/>
+          <p:cNvPr id="28" name="Shape 26"/>
           <p:cNvSpPr/>
           <p:nvPr/>
         </p:nvSpPr>
@@ -8053,7 +7229,7 @@
       </p:sp>
       <p:sp>
         <p:nvSpPr>
-          <p:cNvPr id="34" name="Shape 32"/>
+          <p:cNvPr id="29" name="Shape 27"/>
           <p:cNvSpPr/>
           <p:nvPr/>
         </p:nvSpPr>
@@ -8075,7 +7251,7 @@
       </p:sp>
       <p:sp>
         <p:nvSpPr>
-          <p:cNvPr id="35" name="Shape 33"/>
+          <p:cNvPr id="30" name="Shape 28"/>
           <p:cNvSpPr/>
           <p:nvPr/>
         </p:nvSpPr>
@@ -8109,36 +7285,7 @@
       </p:sp>
       <p:sp>
         <p:nvSpPr>
-          <p:cNvPr id="36" name="Shape 34"/>
-          <p:cNvSpPr/>
-          <p:nvPr/>
-        </p:nvSpPr>
-        <p:spPr>
-          <a:xfrm>
-            <a:off x="796625" y="3366089"/>
-            <a:ext cx="190927" cy="190927"/>
-          </a:xfrm>
-          <a:prstGeom prst="roundRect">
-            <a:avLst>
-              <a:gd name="adj" fmla="val 181992"/>
-            </a:avLst>
-          </a:prstGeom>
-          <a:solidFill>
-            <a:srgbClr val="FDE68A">
-              <a:alpha val="80000"/>
-            </a:srgbClr>
-          </a:solidFill>
-          <a:ln w="12700">
-            <a:solidFill>
-              <a:srgbClr val="333333"/>
-            </a:solidFill>
-            <a:prstDash val="solid"/>
-          </a:ln>
-        </p:spPr>
-      </p:sp>
-      <p:sp>
-        <p:nvSpPr>
-          <p:cNvPr id="37" name="Text 35"/>
+          <p:cNvPr id="31" name="Text 29"/>
           <p:cNvSpPr/>
           <p:nvPr/>
         </p:nvSpPr>
@@ -8177,7 +7324,7 @@
       </p:sp>
       <p:sp>
         <p:nvSpPr>
-          <p:cNvPr id="38" name="Text 36"/>
+          <p:cNvPr id="32" name="Text 30"/>
           <p:cNvSpPr/>
           <p:nvPr/>
         </p:nvSpPr>
@@ -8197,9 +7344,6 @@
           <a:lstStyle/>
           <a:p>
             <a:pPr indent="0" marL="0">
-              <a:lnSpc>
-                <a:spcPct val="115000"/>
-              </a:lnSpc>
               <a:buNone/>
             </a:pPr>
             <a:r>
@@ -8219,7 +7363,7 @@
       </p:sp>
       <p:sp>
         <p:nvSpPr>
-          <p:cNvPr id="39" name="Shape 37"/>
+          <p:cNvPr id="33" name="Shape 31"/>
           <p:cNvSpPr/>
           <p:nvPr/>
         </p:nvSpPr>
@@ -8248,7 +7392,7 @@
       </p:sp>
       <p:sp>
         <p:nvSpPr>
-          <p:cNvPr id="40" name="Shape 38"/>
+          <p:cNvPr id="34" name="Shape 32"/>
           <p:cNvSpPr/>
           <p:nvPr/>
         </p:nvSpPr>
@@ -8270,7 +7414,7 @@
       </p:sp>
       <p:sp>
         <p:nvSpPr>
-          <p:cNvPr id="41" name="Shape 39"/>
+          <p:cNvPr id="35" name="Shape 33"/>
           <p:cNvSpPr/>
           <p:nvPr/>
         </p:nvSpPr>
@@ -8304,36 +7448,7 @@
       </p:sp>
       <p:sp>
         <p:nvSpPr>
-          <p:cNvPr id="42" name="Shape 40"/>
-          <p:cNvSpPr/>
-          <p:nvPr/>
-        </p:nvSpPr>
-        <p:spPr>
-          <a:xfrm>
-            <a:off x="796625" y="3987881"/>
-            <a:ext cx="190927" cy="190927"/>
-          </a:xfrm>
-          <a:prstGeom prst="roundRect">
-            <a:avLst>
-              <a:gd name="adj" fmla="val 181992"/>
-            </a:avLst>
-          </a:prstGeom>
-          <a:solidFill>
-            <a:srgbClr val="FDE68A">
-              <a:alpha val="80000"/>
-            </a:srgbClr>
-          </a:solidFill>
-          <a:ln w="12700">
-            <a:solidFill>
-              <a:srgbClr val="333333"/>
-            </a:solidFill>
-            <a:prstDash val="solid"/>
-          </a:ln>
-        </p:spPr>
-      </p:sp>
-      <p:sp>
-        <p:nvSpPr>
-          <p:cNvPr id="43" name="Text 41"/>
+          <p:cNvPr id="36" name="Text 34"/>
           <p:cNvSpPr/>
           <p:nvPr/>
         </p:nvSpPr>
@@ -8372,7 +7487,7 @@
       </p:sp>
       <p:sp>
         <p:nvSpPr>
-          <p:cNvPr id="44" name="Text 42"/>
+          <p:cNvPr id="37" name="Text 35"/>
           <p:cNvSpPr/>
           <p:nvPr/>
         </p:nvSpPr>
@@ -8392,9 +7507,6 @@
           <a:lstStyle/>
           <a:p>
             <a:pPr indent="0" marL="0">
-              <a:lnSpc>
-                <a:spcPct val="115000"/>
-              </a:lnSpc>
               <a:buNone/>
             </a:pPr>
             <a:r>
@@ -8414,7 +7526,7 @@
       </p:sp>
       <p:sp>
         <p:nvSpPr>
-          <p:cNvPr id="45" name="Shape 43"/>
+          <p:cNvPr id="38" name="Shape 36"/>
           <p:cNvSpPr/>
           <p:nvPr/>
         </p:nvSpPr>
@@ -8434,7 +7546,7 @@
       </p:sp>
       <p:sp>
         <p:nvSpPr>
-          <p:cNvPr id="46" name="Shape 44"/>
+          <p:cNvPr id="39" name="Shape 37"/>
           <p:cNvSpPr/>
           <p:nvPr/>
         </p:nvSpPr>
@@ -8456,7 +7568,7 @@
       </p:sp>
       <p:sp>
         <p:nvSpPr>
-          <p:cNvPr id="47" name="Shape 45"/>
+          <p:cNvPr id="40" name="Shape 38"/>
           <p:cNvSpPr/>
           <p:nvPr/>
         </p:nvSpPr>
@@ -8487,7 +7599,7 @@
       </p:sp>
       <p:sp>
         <p:nvSpPr>
-          <p:cNvPr id="48" name="Text 46"/>
+          <p:cNvPr id="41" name="Text 39"/>
           <p:cNvSpPr/>
           <p:nvPr/>
         </p:nvSpPr>
@@ -8638,55 +7750,6 @@
         </p:nvSpPr>
         <p:spPr>
           <a:xfrm>
-            <a:off x="7909560" y="201168"/>
-            <a:ext cx="685800" cy="685800"/>
-          </a:xfrm>
-          <a:prstGeom prst="ellipse">
-            <a:avLst/>
-          </a:prstGeom>
-          <a:solidFill>
-            <a:srgbClr val="FEF2F2">
-              <a:alpha val="0"/>
-            </a:srgbClr>
-          </a:solidFill>
-          <a:ln w="15875">
-            <a:solidFill>
-              <a:srgbClr val="FDE68A"/>
-            </a:solidFill>
-            <a:prstDash val="solid"/>
-          </a:ln>
-        </p:spPr>
-      </p:sp>
-      <p:sp>
-        <p:nvSpPr>
-          <p:cNvPr id="6" name="Shape 4"/>
-          <p:cNvSpPr/>
-          <p:nvPr/>
-        </p:nvSpPr>
-        <p:spPr>
-          <a:xfrm>
-            <a:off x="8183880" y="384048"/>
-            <a:ext cx="384048" cy="384048"/>
-          </a:xfrm>
-          <a:prstGeom prst="ellipse">
-            <a:avLst/>
-          </a:prstGeom>
-          <a:solidFill>
-            <a:srgbClr val="FDE68A">
-              <a:alpha val="35000"/>
-            </a:srgbClr>
-          </a:solidFill>
-          <a:ln/>
-        </p:spPr>
-      </p:sp>
-      <p:sp>
-        <p:nvSpPr>
-          <p:cNvPr id="7" name="Shape 5"/>
-          <p:cNvSpPr/>
-          <p:nvPr/>
-        </p:nvSpPr>
-        <p:spPr>
-          <a:xfrm>
             <a:off x="109728" y="0"/>
             <a:ext cx="9034272" cy="960120"/>
           </a:xfrm>
@@ -8701,7 +7764,7 @@
       </p:sp>
       <p:sp>
         <p:nvSpPr>
-          <p:cNvPr id="8" name="Shape 6"/>
+          <p:cNvPr id="6" name="Shape 4"/>
           <p:cNvSpPr/>
           <p:nvPr/>
         </p:nvSpPr>
@@ -8723,7 +7786,7 @@
       </p:sp>
       <p:sp>
         <p:nvSpPr>
-          <p:cNvPr id="9" name="Shape 7"/>
+          <p:cNvPr id="7" name="Shape 5"/>
           <p:cNvSpPr/>
           <p:nvPr/>
         </p:nvSpPr>
@@ -8745,7 +7808,7 @@
       </p:sp>
       <p:sp>
         <p:nvSpPr>
-          <p:cNvPr id="10" name="Shape 8"/>
+          <p:cNvPr id="8" name="Shape 6"/>
           <p:cNvSpPr/>
           <p:nvPr/>
         </p:nvSpPr>
@@ -8765,7 +7828,7 @@
       </p:sp>
       <p:sp>
         <p:nvSpPr>
-          <p:cNvPr id="11" name="Shape 9"/>
+          <p:cNvPr id="9" name="Shape 7"/>
           <p:cNvSpPr/>
           <p:nvPr/>
         </p:nvSpPr>
@@ -8796,7 +7859,7 @@
       </p:sp>
       <p:sp>
         <p:nvSpPr>
-          <p:cNvPr id="12" name="Text 10"/>
+          <p:cNvPr id="10" name="Text 8"/>
           <p:cNvSpPr/>
           <p:nvPr/>
         </p:nvSpPr>
@@ -8837,7 +7900,7 @@
       </p:sp>
       <p:sp>
         <p:nvSpPr>
-          <p:cNvPr id="13" name="Text 11"/>
+          <p:cNvPr id="11" name="Text 9"/>
           <p:cNvSpPr/>
           <p:nvPr/>
         </p:nvSpPr>
@@ -8876,7 +7939,7 @@
       </p:sp>
       <p:sp>
         <p:nvSpPr>
-          <p:cNvPr id="14" name="Shape 12"/>
+          <p:cNvPr id="12" name="Shape 10"/>
           <p:cNvSpPr/>
           <p:nvPr/>
         </p:nvSpPr>
@@ -8910,7 +7973,7 @@
       </p:sp>
       <p:sp>
         <p:nvSpPr>
-          <p:cNvPr id="15" name="Shape 13"/>
+          <p:cNvPr id="13" name="Shape 11"/>
           <p:cNvSpPr/>
           <p:nvPr/>
         </p:nvSpPr>
@@ -8939,7 +8002,7 @@
       </p:sp>
       <p:sp>
         <p:nvSpPr>
-          <p:cNvPr id="16" name="Shape 14"/>
+          <p:cNvPr id="14" name="Shape 12"/>
           <p:cNvSpPr/>
           <p:nvPr/>
         </p:nvSpPr>
@@ -8961,7 +8024,7 @@
       </p:sp>
       <p:sp>
         <p:nvSpPr>
-          <p:cNvPr id="17" name="Shape 15"/>
+          <p:cNvPr id="15" name="Shape 13"/>
           <p:cNvSpPr/>
           <p:nvPr/>
         </p:nvSpPr>
@@ -8995,36 +8058,7 @@
       </p:sp>
       <p:sp>
         <p:nvSpPr>
-          <p:cNvPr id="18" name="Shape 16"/>
-          <p:cNvSpPr/>
-          <p:nvPr/>
-        </p:nvSpPr>
-        <p:spPr>
-          <a:xfrm>
-            <a:off x="796625" y="1500713"/>
-            <a:ext cx="190927" cy="190927"/>
-          </a:xfrm>
-          <a:prstGeom prst="roundRect">
-            <a:avLst>
-              <a:gd name="adj" fmla="val 181992"/>
-            </a:avLst>
-          </a:prstGeom>
-          <a:solidFill>
-            <a:srgbClr val="FDE68A">
-              <a:alpha val="80000"/>
-            </a:srgbClr>
-          </a:solidFill>
-          <a:ln w="12700">
-            <a:solidFill>
-              <a:srgbClr val="333333"/>
-            </a:solidFill>
-            <a:prstDash val="solid"/>
-          </a:ln>
-        </p:spPr>
-      </p:sp>
-      <p:sp>
-        <p:nvSpPr>
-          <p:cNvPr id="19" name="Text 17"/>
+          <p:cNvPr id="16" name="Text 14"/>
           <p:cNvSpPr/>
           <p:nvPr/>
         </p:nvSpPr>
@@ -9063,7 +8097,7 @@
       </p:sp>
       <p:sp>
         <p:nvSpPr>
-          <p:cNvPr id="20" name="Text 18"/>
+          <p:cNvPr id="17" name="Text 15"/>
           <p:cNvSpPr/>
           <p:nvPr/>
         </p:nvSpPr>
@@ -9083,9 +8117,6 @@
           <a:lstStyle/>
           <a:p>
             <a:pPr indent="0" marL="0">
-              <a:lnSpc>
-                <a:spcPct val="115000"/>
-              </a:lnSpc>
               <a:buNone/>
             </a:pPr>
             <a:r>
@@ -9105,7 +8136,7 @@
       </p:sp>
       <p:sp>
         <p:nvSpPr>
-          <p:cNvPr id="21" name="Shape 19"/>
+          <p:cNvPr id="18" name="Shape 16"/>
           <p:cNvSpPr/>
           <p:nvPr/>
         </p:nvSpPr>
@@ -9134,7 +8165,7 @@
       </p:sp>
       <p:sp>
         <p:nvSpPr>
-          <p:cNvPr id="22" name="Shape 20"/>
+          <p:cNvPr id="19" name="Shape 17"/>
           <p:cNvSpPr/>
           <p:nvPr/>
         </p:nvSpPr>
@@ -9156,7 +8187,7 @@
       </p:sp>
       <p:sp>
         <p:nvSpPr>
-          <p:cNvPr id="23" name="Shape 21"/>
+          <p:cNvPr id="20" name="Shape 18"/>
           <p:cNvSpPr/>
           <p:nvPr/>
         </p:nvSpPr>
@@ -9190,36 +8221,7 @@
       </p:sp>
       <p:sp>
         <p:nvSpPr>
-          <p:cNvPr id="24" name="Shape 22"/>
-          <p:cNvSpPr/>
-          <p:nvPr/>
-        </p:nvSpPr>
-        <p:spPr>
-          <a:xfrm>
-            <a:off x="796625" y="2122505"/>
-            <a:ext cx="190927" cy="190927"/>
-          </a:xfrm>
-          <a:prstGeom prst="roundRect">
-            <a:avLst>
-              <a:gd name="adj" fmla="val 181992"/>
-            </a:avLst>
-          </a:prstGeom>
-          <a:solidFill>
-            <a:srgbClr val="FDE68A">
-              <a:alpha val="80000"/>
-            </a:srgbClr>
-          </a:solidFill>
-          <a:ln w="12700">
-            <a:solidFill>
-              <a:srgbClr val="333333"/>
-            </a:solidFill>
-            <a:prstDash val="solid"/>
-          </a:ln>
-        </p:spPr>
-      </p:sp>
-      <p:sp>
-        <p:nvSpPr>
-          <p:cNvPr id="25" name="Text 23"/>
+          <p:cNvPr id="21" name="Text 19"/>
           <p:cNvSpPr/>
           <p:nvPr/>
         </p:nvSpPr>
@@ -9258,7 +8260,7 @@
       </p:sp>
       <p:sp>
         <p:nvSpPr>
-          <p:cNvPr id="26" name="Text 24"/>
+          <p:cNvPr id="22" name="Text 20"/>
           <p:cNvSpPr/>
           <p:nvPr/>
         </p:nvSpPr>
@@ -9278,9 +8280,6 @@
           <a:lstStyle/>
           <a:p>
             <a:pPr indent="0" marL="0">
-              <a:lnSpc>
-                <a:spcPct val="115000"/>
-              </a:lnSpc>
               <a:buNone/>
             </a:pPr>
             <a:r>
@@ -9300,7 +8299,7 @@
       </p:sp>
       <p:sp>
         <p:nvSpPr>
-          <p:cNvPr id="27" name="Shape 25"/>
+          <p:cNvPr id="23" name="Shape 21"/>
           <p:cNvSpPr/>
           <p:nvPr/>
         </p:nvSpPr>
@@ -9329,7 +8328,7 @@
       </p:sp>
       <p:sp>
         <p:nvSpPr>
-          <p:cNvPr id="28" name="Shape 26"/>
+          <p:cNvPr id="24" name="Shape 22"/>
           <p:cNvSpPr/>
           <p:nvPr/>
         </p:nvSpPr>
@@ -9351,7 +8350,7 @@
       </p:sp>
       <p:sp>
         <p:nvSpPr>
-          <p:cNvPr id="29" name="Shape 27"/>
+          <p:cNvPr id="25" name="Shape 23"/>
           <p:cNvSpPr/>
           <p:nvPr/>
         </p:nvSpPr>
@@ -9385,36 +8384,7 @@
       </p:sp>
       <p:sp>
         <p:nvSpPr>
-          <p:cNvPr id="30" name="Shape 28"/>
-          <p:cNvSpPr/>
-          <p:nvPr/>
-        </p:nvSpPr>
-        <p:spPr>
-          <a:xfrm>
-            <a:off x="796625" y="2744297"/>
-            <a:ext cx="190927" cy="190927"/>
-          </a:xfrm>
-          <a:prstGeom prst="roundRect">
-            <a:avLst>
-              <a:gd name="adj" fmla="val 181992"/>
-            </a:avLst>
-          </a:prstGeom>
-          <a:solidFill>
-            <a:srgbClr val="FDE68A">
-              <a:alpha val="80000"/>
-            </a:srgbClr>
-          </a:solidFill>
-          <a:ln w="12700">
-            <a:solidFill>
-              <a:srgbClr val="333333"/>
-            </a:solidFill>
-            <a:prstDash val="solid"/>
-          </a:ln>
-        </p:spPr>
-      </p:sp>
-      <p:sp>
-        <p:nvSpPr>
-          <p:cNvPr id="31" name="Text 29"/>
+          <p:cNvPr id="26" name="Text 24"/>
           <p:cNvSpPr/>
           <p:nvPr/>
         </p:nvSpPr>
@@ -9453,7 +8423,7 @@
       </p:sp>
       <p:sp>
         <p:nvSpPr>
-          <p:cNvPr id="32" name="Text 30"/>
+          <p:cNvPr id="27" name="Text 25"/>
           <p:cNvSpPr/>
           <p:nvPr/>
         </p:nvSpPr>
@@ -9473,9 +8443,6 @@
           <a:lstStyle/>
           <a:p>
             <a:pPr indent="0" marL="0">
-              <a:lnSpc>
-                <a:spcPct val="115000"/>
-              </a:lnSpc>
               <a:buNone/>
             </a:pPr>
             <a:r>
@@ -9495,7 +8462,7 @@
       </p:sp>
       <p:sp>
         <p:nvSpPr>
-          <p:cNvPr id="33" name="Shape 31"/>
+          <p:cNvPr id="28" name="Shape 26"/>
           <p:cNvSpPr/>
           <p:nvPr/>
         </p:nvSpPr>
@@ -9524,7 +8491,7 @@
       </p:sp>
       <p:sp>
         <p:nvSpPr>
-          <p:cNvPr id="34" name="Shape 32"/>
+          <p:cNvPr id="29" name="Shape 27"/>
           <p:cNvSpPr/>
           <p:nvPr/>
         </p:nvSpPr>
@@ -9546,7 +8513,7 @@
       </p:sp>
       <p:sp>
         <p:nvSpPr>
-          <p:cNvPr id="35" name="Shape 33"/>
+          <p:cNvPr id="30" name="Shape 28"/>
           <p:cNvSpPr/>
           <p:nvPr/>
         </p:nvSpPr>
@@ -9580,36 +8547,7 @@
       </p:sp>
       <p:sp>
         <p:nvSpPr>
-          <p:cNvPr id="36" name="Shape 34"/>
-          <p:cNvSpPr/>
-          <p:nvPr/>
-        </p:nvSpPr>
-        <p:spPr>
-          <a:xfrm>
-            <a:off x="796625" y="3366089"/>
-            <a:ext cx="190927" cy="190927"/>
-          </a:xfrm>
-          <a:prstGeom prst="roundRect">
-            <a:avLst>
-              <a:gd name="adj" fmla="val 181992"/>
-            </a:avLst>
-          </a:prstGeom>
-          <a:solidFill>
-            <a:srgbClr val="FDE68A">
-              <a:alpha val="80000"/>
-            </a:srgbClr>
-          </a:solidFill>
-          <a:ln w="12700">
-            <a:solidFill>
-              <a:srgbClr val="333333"/>
-            </a:solidFill>
-            <a:prstDash val="solid"/>
-          </a:ln>
-        </p:spPr>
-      </p:sp>
-      <p:sp>
-        <p:nvSpPr>
-          <p:cNvPr id="37" name="Text 35"/>
+          <p:cNvPr id="31" name="Text 29"/>
           <p:cNvSpPr/>
           <p:nvPr/>
         </p:nvSpPr>
@@ -9648,7 +8586,7 @@
       </p:sp>
       <p:sp>
         <p:nvSpPr>
-          <p:cNvPr id="38" name="Text 36"/>
+          <p:cNvPr id="32" name="Text 30"/>
           <p:cNvSpPr/>
           <p:nvPr/>
         </p:nvSpPr>
@@ -9668,9 +8606,6 @@
           <a:lstStyle/>
           <a:p>
             <a:pPr indent="0" marL="0">
-              <a:lnSpc>
-                <a:spcPct val="115000"/>
-              </a:lnSpc>
               <a:buNone/>
             </a:pPr>
             <a:r>
@@ -9690,7 +8625,7 @@
       </p:sp>
       <p:sp>
         <p:nvSpPr>
-          <p:cNvPr id="39" name="Shape 37"/>
+          <p:cNvPr id="33" name="Shape 31"/>
           <p:cNvSpPr/>
           <p:nvPr/>
         </p:nvSpPr>
@@ -9719,7 +8654,7 @@
       </p:sp>
       <p:sp>
         <p:nvSpPr>
-          <p:cNvPr id="40" name="Shape 38"/>
+          <p:cNvPr id="34" name="Shape 32"/>
           <p:cNvSpPr/>
           <p:nvPr/>
         </p:nvSpPr>
@@ -9741,7 +8676,7 @@
       </p:sp>
       <p:sp>
         <p:nvSpPr>
-          <p:cNvPr id="41" name="Shape 39"/>
+          <p:cNvPr id="35" name="Shape 33"/>
           <p:cNvSpPr/>
           <p:nvPr/>
         </p:nvSpPr>
@@ -9775,36 +8710,7 @@
       </p:sp>
       <p:sp>
         <p:nvSpPr>
-          <p:cNvPr id="42" name="Shape 40"/>
-          <p:cNvSpPr/>
-          <p:nvPr/>
-        </p:nvSpPr>
-        <p:spPr>
-          <a:xfrm>
-            <a:off x="796625" y="3987881"/>
-            <a:ext cx="190927" cy="190927"/>
-          </a:xfrm>
-          <a:prstGeom prst="roundRect">
-            <a:avLst>
-              <a:gd name="adj" fmla="val 181992"/>
-            </a:avLst>
-          </a:prstGeom>
-          <a:solidFill>
-            <a:srgbClr val="FDE68A">
-              <a:alpha val="80000"/>
-            </a:srgbClr>
-          </a:solidFill>
-          <a:ln w="12700">
-            <a:solidFill>
-              <a:srgbClr val="333333"/>
-            </a:solidFill>
-            <a:prstDash val="solid"/>
-          </a:ln>
-        </p:spPr>
-      </p:sp>
-      <p:sp>
-        <p:nvSpPr>
-          <p:cNvPr id="43" name="Text 41"/>
+          <p:cNvPr id="36" name="Text 34"/>
           <p:cNvSpPr/>
           <p:nvPr/>
         </p:nvSpPr>
@@ -9843,7 +8749,7 @@
       </p:sp>
       <p:sp>
         <p:nvSpPr>
-          <p:cNvPr id="44" name="Text 42"/>
+          <p:cNvPr id="37" name="Text 35"/>
           <p:cNvSpPr/>
           <p:nvPr/>
         </p:nvSpPr>
@@ -9863,9 +8769,6 @@
           <a:lstStyle/>
           <a:p>
             <a:pPr indent="0" marL="0">
-              <a:lnSpc>
-                <a:spcPct val="115000"/>
-              </a:lnSpc>
               <a:buNone/>
             </a:pPr>
             <a:r>
@@ -9885,7 +8788,7 @@
       </p:sp>
       <p:sp>
         <p:nvSpPr>
-          <p:cNvPr id="45" name="Shape 43"/>
+          <p:cNvPr id="38" name="Shape 36"/>
           <p:cNvSpPr/>
           <p:nvPr/>
         </p:nvSpPr>
@@ -9905,7 +8808,7 @@
       </p:sp>
       <p:sp>
         <p:nvSpPr>
-          <p:cNvPr id="46" name="Shape 44"/>
+          <p:cNvPr id="39" name="Shape 37"/>
           <p:cNvSpPr/>
           <p:nvPr/>
         </p:nvSpPr>
@@ -9927,7 +8830,7 @@
       </p:sp>
       <p:sp>
         <p:nvSpPr>
-          <p:cNvPr id="47" name="Shape 45"/>
+          <p:cNvPr id="40" name="Shape 38"/>
           <p:cNvSpPr/>
           <p:nvPr/>
         </p:nvSpPr>
@@ -9958,7 +8861,7 @@
       </p:sp>
       <p:sp>
         <p:nvSpPr>
-          <p:cNvPr id="48" name="Text 46"/>
+          <p:cNvPr id="41" name="Text 39"/>
           <p:cNvSpPr/>
           <p:nvPr/>
         </p:nvSpPr>
@@ -10109,55 +9012,6 @@
         </p:nvSpPr>
         <p:spPr>
           <a:xfrm>
-            <a:off x="7909560" y="201168"/>
-            <a:ext cx="685800" cy="685800"/>
-          </a:xfrm>
-          <a:prstGeom prst="ellipse">
-            <a:avLst/>
-          </a:prstGeom>
-          <a:solidFill>
-            <a:srgbClr val="FEF2F2">
-              <a:alpha val="0"/>
-            </a:srgbClr>
-          </a:solidFill>
-          <a:ln w="15875">
-            <a:solidFill>
-              <a:srgbClr val="FDE68A"/>
-            </a:solidFill>
-            <a:prstDash val="solid"/>
-          </a:ln>
-        </p:spPr>
-      </p:sp>
-      <p:sp>
-        <p:nvSpPr>
-          <p:cNvPr id="6" name="Shape 4"/>
-          <p:cNvSpPr/>
-          <p:nvPr/>
-        </p:nvSpPr>
-        <p:spPr>
-          <a:xfrm>
-            <a:off x="8183880" y="384048"/>
-            <a:ext cx="384048" cy="384048"/>
-          </a:xfrm>
-          <a:prstGeom prst="ellipse">
-            <a:avLst/>
-          </a:prstGeom>
-          <a:solidFill>
-            <a:srgbClr val="FDE68A">
-              <a:alpha val="35000"/>
-            </a:srgbClr>
-          </a:solidFill>
-          <a:ln/>
-        </p:spPr>
-      </p:sp>
-      <p:sp>
-        <p:nvSpPr>
-          <p:cNvPr id="7" name="Shape 5"/>
-          <p:cNvSpPr/>
-          <p:nvPr/>
-        </p:nvSpPr>
-        <p:spPr>
-          <a:xfrm>
             <a:off x="109728" y="0"/>
             <a:ext cx="9034272" cy="960120"/>
           </a:xfrm>
@@ -10172,7 +9026,7 @@
       </p:sp>
       <p:sp>
         <p:nvSpPr>
-          <p:cNvPr id="8" name="Shape 6"/>
+          <p:cNvPr id="6" name="Shape 4"/>
           <p:cNvSpPr/>
           <p:nvPr/>
         </p:nvSpPr>
@@ -10194,7 +9048,7 @@
       </p:sp>
       <p:sp>
         <p:nvSpPr>
-          <p:cNvPr id="9" name="Shape 7"/>
+          <p:cNvPr id="7" name="Shape 5"/>
           <p:cNvSpPr/>
           <p:nvPr/>
         </p:nvSpPr>
@@ -10216,7 +9070,7 @@
       </p:sp>
       <p:sp>
         <p:nvSpPr>
-          <p:cNvPr id="10" name="Shape 8"/>
+          <p:cNvPr id="8" name="Shape 6"/>
           <p:cNvSpPr/>
           <p:nvPr/>
         </p:nvSpPr>
@@ -10236,7 +9090,7 @@
       </p:sp>
       <p:sp>
         <p:nvSpPr>
-          <p:cNvPr id="11" name="Shape 9"/>
+          <p:cNvPr id="9" name="Shape 7"/>
           <p:cNvSpPr/>
           <p:nvPr/>
         </p:nvSpPr>
@@ -10267,7 +9121,7 @@
       </p:sp>
       <p:sp>
         <p:nvSpPr>
-          <p:cNvPr id="12" name="Text 10"/>
+          <p:cNvPr id="10" name="Text 8"/>
           <p:cNvSpPr/>
           <p:nvPr/>
         </p:nvSpPr>
@@ -10308,7 +9162,7 @@
       </p:sp>
       <p:sp>
         <p:nvSpPr>
-          <p:cNvPr id="13" name="Text 11"/>
+          <p:cNvPr id="11" name="Text 9"/>
           <p:cNvSpPr/>
           <p:nvPr/>
         </p:nvSpPr>
@@ -10347,7 +9201,7 @@
       </p:sp>
       <p:sp>
         <p:nvSpPr>
-          <p:cNvPr id="14" name="Shape 12"/>
+          <p:cNvPr id="12" name="Shape 10"/>
           <p:cNvSpPr/>
           <p:nvPr/>
         </p:nvSpPr>
@@ -10381,7 +9235,7 @@
       </p:sp>
       <p:sp>
         <p:nvSpPr>
-          <p:cNvPr id="15" name="Shape 13"/>
+          <p:cNvPr id="13" name="Shape 11"/>
           <p:cNvSpPr/>
           <p:nvPr/>
         </p:nvSpPr>
@@ -10410,7 +9264,7 @@
       </p:sp>
       <p:sp>
         <p:nvSpPr>
-          <p:cNvPr id="16" name="Shape 14"/>
+          <p:cNvPr id="14" name="Shape 12"/>
           <p:cNvSpPr/>
           <p:nvPr/>
         </p:nvSpPr>
@@ -10432,7 +9286,7 @@
       </p:sp>
       <p:sp>
         <p:nvSpPr>
-          <p:cNvPr id="17" name="Shape 15"/>
+          <p:cNvPr id="15" name="Shape 13"/>
           <p:cNvSpPr/>
           <p:nvPr/>
         </p:nvSpPr>
@@ -10466,36 +9320,7 @@
       </p:sp>
       <p:sp>
         <p:nvSpPr>
-          <p:cNvPr id="18" name="Shape 16"/>
-          <p:cNvSpPr/>
-          <p:nvPr/>
-        </p:nvSpPr>
-        <p:spPr>
-          <a:xfrm>
-            <a:off x="796625" y="1500713"/>
-            <a:ext cx="190927" cy="190927"/>
-          </a:xfrm>
-          <a:prstGeom prst="roundRect">
-            <a:avLst>
-              <a:gd name="adj" fmla="val 181992"/>
-            </a:avLst>
-          </a:prstGeom>
-          <a:solidFill>
-            <a:srgbClr val="FDE68A">
-              <a:alpha val="80000"/>
-            </a:srgbClr>
-          </a:solidFill>
-          <a:ln w="12700">
-            <a:solidFill>
-              <a:srgbClr val="333333"/>
-            </a:solidFill>
-            <a:prstDash val="solid"/>
-          </a:ln>
-        </p:spPr>
-      </p:sp>
-      <p:sp>
-        <p:nvSpPr>
-          <p:cNvPr id="19" name="Text 17"/>
+          <p:cNvPr id="16" name="Text 14"/>
           <p:cNvSpPr/>
           <p:nvPr/>
         </p:nvSpPr>
@@ -10534,7 +9359,7 @@
       </p:sp>
       <p:sp>
         <p:nvSpPr>
-          <p:cNvPr id="20" name="Text 18"/>
+          <p:cNvPr id="17" name="Text 15"/>
           <p:cNvSpPr/>
           <p:nvPr/>
         </p:nvSpPr>
@@ -10554,9 +9379,6 @@
           <a:lstStyle/>
           <a:p>
             <a:pPr indent="0" marL="0">
-              <a:lnSpc>
-                <a:spcPct val="115000"/>
-              </a:lnSpc>
               <a:buNone/>
             </a:pPr>
             <a:r>
@@ -10576,7 +9398,7 @@
       </p:sp>
       <p:sp>
         <p:nvSpPr>
-          <p:cNvPr id="21" name="Shape 19"/>
+          <p:cNvPr id="18" name="Shape 16"/>
           <p:cNvSpPr/>
           <p:nvPr/>
         </p:nvSpPr>
@@ -10605,7 +9427,7 @@
       </p:sp>
       <p:sp>
         <p:nvSpPr>
-          <p:cNvPr id="22" name="Shape 20"/>
+          <p:cNvPr id="19" name="Shape 17"/>
           <p:cNvSpPr/>
           <p:nvPr/>
         </p:nvSpPr>
@@ -10627,7 +9449,7 @@
       </p:sp>
       <p:sp>
         <p:nvSpPr>
-          <p:cNvPr id="23" name="Shape 21"/>
+          <p:cNvPr id="20" name="Shape 18"/>
           <p:cNvSpPr/>
           <p:nvPr/>
         </p:nvSpPr>
@@ -10661,36 +9483,7 @@
       </p:sp>
       <p:sp>
         <p:nvSpPr>
-          <p:cNvPr id="24" name="Shape 22"/>
-          <p:cNvSpPr/>
-          <p:nvPr/>
-        </p:nvSpPr>
-        <p:spPr>
-          <a:xfrm>
-            <a:off x="796625" y="2122505"/>
-            <a:ext cx="190927" cy="190927"/>
-          </a:xfrm>
-          <a:prstGeom prst="roundRect">
-            <a:avLst>
-              <a:gd name="adj" fmla="val 181992"/>
-            </a:avLst>
-          </a:prstGeom>
-          <a:solidFill>
-            <a:srgbClr val="FDE68A">
-              <a:alpha val="80000"/>
-            </a:srgbClr>
-          </a:solidFill>
-          <a:ln w="12700">
-            <a:solidFill>
-              <a:srgbClr val="333333"/>
-            </a:solidFill>
-            <a:prstDash val="solid"/>
-          </a:ln>
-        </p:spPr>
-      </p:sp>
-      <p:sp>
-        <p:nvSpPr>
-          <p:cNvPr id="25" name="Text 23"/>
+          <p:cNvPr id="21" name="Text 19"/>
           <p:cNvSpPr/>
           <p:nvPr/>
         </p:nvSpPr>
@@ -10729,7 +9522,7 @@
       </p:sp>
       <p:sp>
         <p:nvSpPr>
-          <p:cNvPr id="26" name="Text 24"/>
+          <p:cNvPr id="22" name="Text 20"/>
           <p:cNvSpPr/>
           <p:nvPr/>
         </p:nvSpPr>
@@ -10749,9 +9542,6 @@
           <a:lstStyle/>
           <a:p>
             <a:pPr indent="0" marL="0">
-              <a:lnSpc>
-                <a:spcPct val="115000"/>
-              </a:lnSpc>
               <a:buNone/>
             </a:pPr>
             <a:r>
@@ -10771,7 +9561,7 @@
       </p:sp>
       <p:sp>
         <p:nvSpPr>
-          <p:cNvPr id="27" name="Shape 25"/>
+          <p:cNvPr id="23" name="Shape 21"/>
           <p:cNvSpPr/>
           <p:nvPr/>
         </p:nvSpPr>
@@ -10800,7 +9590,7 @@
       </p:sp>
       <p:sp>
         <p:nvSpPr>
-          <p:cNvPr id="28" name="Shape 26"/>
+          <p:cNvPr id="24" name="Shape 22"/>
           <p:cNvSpPr/>
           <p:nvPr/>
         </p:nvSpPr>
@@ -10822,7 +9612,7 @@
       </p:sp>
       <p:sp>
         <p:nvSpPr>
-          <p:cNvPr id="29" name="Shape 27"/>
+          <p:cNvPr id="25" name="Shape 23"/>
           <p:cNvSpPr/>
           <p:nvPr/>
         </p:nvSpPr>
@@ -10856,36 +9646,7 @@
       </p:sp>
       <p:sp>
         <p:nvSpPr>
-          <p:cNvPr id="30" name="Shape 28"/>
-          <p:cNvSpPr/>
-          <p:nvPr/>
-        </p:nvSpPr>
-        <p:spPr>
-          <a:xfrm>
-            <a:off x="796625" y="2744297"/>
-            <a:ext cx="190927" cy="190927"/>
-          </a:xfrm>
-          <a:prstGeom prst="roundRect">
-            <a:avLst>
-              <a:gd name="adj" fmla="val 181992"/>
-            </a:avLst>
-          </a:prstGeom>
-          <a:solidFill>
-            <a:srgbClr val="FDE68A">
-              <a:alpha val="80000"/>
-            </a:srgbClr>
-          </a:solidFill>
-          <a:ln w="12700">
-            <a:solidFill>
-              <a:srgbClr val="333333"/>
-            </a:solidFill>
-            <a:prstDash val="solid"/>
-          </a:ln>
-        </p:spPr>
-      </p:sp>
-      <p:sp>
-        <p:nvSpPr>
-          <p:cNvPr id="31" name="Text 29"/>
+          <p:cNvPr id="26" name="Text 24"/>
           <p:cNvSpPr/>
           <p:nvPr/>
         </p:nvSpPr>
@@ -10924,7 +9685,7 @@
       </p:sp>
       <p:sp>
         <p:nvSpPr>
-          <p:cNvPr id="32" name="Text 30"/>
+          <p:cNvPr id="27" name="Text 25"/>
           <p:cNvSpPr/>
           <p:nvPr/>
         </p:nvSpPr>
@@ -10944,9 +9705,6 @@
           <a:lstStyle/>
           <a:p>
             <a:pPr indent="0" marL="0">
-              <a:lnSpc>
-                <a:spcPct val="115000"/>
-              </a:lnSpc>
               <a:buNone/>
             </a:pPr>
             <a:r>
@@ -10966,7 +9724,7 @@
       </p:sp>
       <p:sp>
         <p:nvSpPr>
-          <p:cNvPr id="33" name="Shape 31"/>
+          <p:cNvPr id="28" name="Shape 26"/>
           <p:cNvSpPr/>
           <p:nvPr/>
         </p:nvSpPr>
@@ -10995,7 +9753,7 @@
       </p:sp>
       <p:sp>
         <p:nvSpPr>
-          <p:cNvPr id="34" name="Shape 32"/>
+          <p:cNvPr id="29" name="Shape 27"/>
           <p:cNvSpPr/>
           <p:nvPr/>
         </p:nvSpPr>
@@ -11017,7 +9775,7 @@
       </p:sp>
       <p:sp>
         <p:nvSpPr>
-          <p:cNvPr id="35" name="Shape 33"/>
+          <p:cNvPr id="30" name="Shape 28"/>
           <p:cNvSpPr/>
           <p:nvPr/>
         </p:nvSpPr>
@@ -11051,36 +9809,7 @@
       </p:sp>
       <p:sp>
         <p:nvSpPr>
-          <p:cNvPr id="36" name="Shape 34"/>
-          <p:cNvSpPr/>
-          <p:nvPr/>
-        </p:nvSpPr>
-        <p:spPr>
-          <a:xfrm>
-            <a:off x="796625" y="3366089"/>
-            <a:ext cx="190927" cy="190927"/>
-          </a:xfrm>
-          <a:prstGeom prst="roundRect">
-            <a:avLst>
-              <a:gd name="adj" fmla="val 181992"/>
-            </a:avLst>
-          </a:prstGeom>
-          <a:solidFill>
-            <a:srgbClr val="FDE68A">
-              <a:alpha val="80000"/>
-            </a:srgbClr>
-          </a:solidFill>
-          <a:ln w="12700">
-            <a:solidFill>
-              <a:srgbClr val="333333"/>
-            </a:solidFill>
-            <a:prstDash val="solid"/>
-          </a:ln>
-        </p:spPr>
-      </p:sp>
-      <p:sp>
-        <p:nvSpPr>
-          <p:cNvPr id="37" name="Text 35"/>
+          <p:cNvPr id="31" name="Text 29"/>
           <p:cNvSpPr/>
           <p:nvPr/>
         </p:nvSpPr>
@@ -11119,7 +9848,7 @@
       </p:sp>
       <p:sp>
         <p:nvSpPr>
-          <p:cNvPr id="38" name="Text 36"/>
+          <p:cNvPr id="32" name="Text 30"/>
           <p:cNvSpPr/>
           <p:nvPr/>
         </p:nvSpPr>
@@ -11139,9 +9868,6 @@
           <a:lstStyle/>
           <a:p>
             <a:pPr indent="0" marL="0">
-              <a:lnSpc>
-                <a:spcPct val="115000"/>
-              </a:lnSpc>
               <a:buNone/>
             </a:pPr>
             <a:r>
@@ -11161,7 +9887,7 @@
       </p:sp>
       <p:sp>
         <p:nvSpPr>
-          <p:cNvPr id="39" name="Shape 37"/>
+          <p:cNvPr id="33" name="Shape 31"/>
           <p:cNvSpPr/>
           <p:nvPr/>
         </p:nvSpPr>
@@ -11190,7 +9916,7 @@
       </p:sp>
       <p:sp>
         <p:nvSpPr>
-          <p:cNvPr id="40" name="Shape 38"/>
+          <p:cNvPr id="34" name="Shape 32"/>
           <p:cNvSpPr/>
           <p:nvPr/>
         </p:nvSpPr>
@@ -11212,7 +9938,7 @@
       </p:sp>
       <p:sp>
         <p:nvSpPr>
-          <p:cNvPr id="41" name="Shape 39"/>
+          <p:cNvPr id="35" name="Shape 33"/>
           <p:cNvSpPr/>
           <p:nvPr/>
         </p:nvSpPr>
@@ -11246,36 +9972,7 @@
       </p:sp>
       <p:sp>
         <p:nvSpPr>
-          <p:cNvPr id="42" name="Shape 40"/>
-          <p:cNvSpPr/>
-          <p:nvPr/>
-        </p:nvSpPr>
-        <p:spPr>
-          <a:xfrm>
-            <a:off x="796625" y="3987881"/>
-            <a:ext cx="190927" cy="190927"/>
-          </a:xfrm>
-          <a:prstGeom prst="roundRect">
-            <a:avLst>
-              <a:gd name="adj" fmla="val 181992"/>
-            </a:avLst>
-          </a:prstGeom>
-          <a:solidFill>
-            <a:srgbClr val="FDE68A">
-              <a:alpha val="80000"/>
-            </a:srgbClr>
-          </a:solidFill>
-          <a:ln w="12700">
-            <a:solidFill>
-              <a:srgbClr val="333333"/>
-            </a:solidFill>
-            <a:prstDash val="solid"/>
-          </a:ln>
-        </p:spPr>
-      </p:sp>
-      <p:sp>
-        <p:nvSpPr>
-          <p:cNvPr id="43" name="Text 41"/>
+          <p:cNvPr id="36" name="Text 34"/>
           <p:cNvSpPr/>
           <p:nvPr/>
         </p:nvSpPr>
@@ -11314,7 +10011,7 @@
       </p:sp>
       <p:sp>
         <p:nvSpPr>
-          <p:cNvPr id="44" name="Text 42"/>
+          <p:cNvPr id="37" name="Text 35"/>
           <p:cNvSpPr/>
           <p:nvPr/>
         </p:nvSpPr>
@@ -11334,9 +10031,6 @@
           <a:lstStyle/>
           <a:p>
             <a:pPr indent="0" marL="0">
-              <a:lnSpc>
-                <a:spcPct val="115000"/>
-              </a:lnSpc>
               <a:buNone/>
             </a:pPr>
             <a:r>
@@ -11356,7 +10050,7 @@
       </p:sp>
       <p:sp>
         <p:nvSpPr>
-          <p:cNvPr id="45" name="Shape 43"/>
+          <p:cNvPr id="38" name="Shape 36"/>
           <p:cNvSpPr/>
           <p:nvPr/>
         </p:nvSpPr>
@@ -11376,7 +10070,7 @@
       </p:sp>
       <p:sp>
         <p:nvSpPr>
-          <p:cNvPr id="46" name="Shape 44"/>
+          <p:cNvPr id="39" name="Shape 37"/>
           <p:cNvSpPr/>
           <p:nvPr/>
         </p:nvSpPr>
@@ -11398,7 +10092,7 @@
       </p:sp>
       <p:sp>
         <p:nvSpPr>
-          <p:cNvPr id="47" name="Shape 45"/>
+          <p:cNvPr id="40" name="Shape 38"/>
           <p:cNvSpPr/>
           <p:nvPr/>
         </p:nvSpPr>
@@ -11429,7 +10123,7 @@
       </p:sp>
       <p:sp>
         <p:nvSpPr>
-          <p:cNvPr id="48" name="Text 46"/>
+          <p:cNvPr id="41" name="Text 39"/>
           <p:cNvSpPr/>
           <p:nvPr/>
         </p:nvSpPr>
@@ -11580,55 +10274,6 @@
         </p:nvSpPr>
         <p:spPr>
           <a:xfrm>
-            <a:off x="7909560" y="201168"/>
-            <a:ext cx="685800" cy="685800"/>
-          </a:xfrm>
-          <a:prstGeom prst="ellipse">
-            <a:avLst/>
-          </a:prstGeom>
-          <a:solidFill>
-            <a:srgbClr val="FEF2F2">
-              <a:alpha val="0"/>
-            </a:srgbClr>
-          </a:solidFill>
-          <a:ln w="15875">
-            <a:solidFill>
-              <a:srgbClr val="FDE68A"/>
-            </a:solidFill>
-            <a:prstDash val="solid"/>
-          </a:ln>
-        </p:spPr>
-      </p:sp>
-      <p:sp>
-        <p:nvSpPr>
-          <p:cNvPr id="6" name="Shape 4"/>
-          <p:cNvSpPr/>
-          <p:nvPr/>
-        </p:nvSpPr>
-        <p:spPr>
-          <a:xfrm>
-            <a:off x="8183880" y="384048"/>
-            <a:ext cx="384048" cy="384048"/>
-          </a:xfrm>
-          <a:prstGeom prst="ellipse">
-            <a:avLst/>
-          </a:prstGeom>
-          <a:solidFill>
-            <a:srgbClr val="FDE68A">
-              <a:alpha val="35000"/>
-            </a:srgbClr>
-          </a:solidFill>
-          <a:ln/>
-        </p:spPr>
-      </p:sp>
-      <p:sp>
-        <p:nvSpPr>
-          <p:cNvPr id="7" name="Shape 5"/>
-          <p:cNvSpPr/>
-          <p:nvPr/>
-        </p:nvSpPr>
-        <p:spPr>
-          <a:xfrm>
             <a:off x="109728" y="0"/>
             <a:ext cx="9034272" cy="960120"/>
           </a:xfrm>
@@ -11643,7 +10288,7 @@
       </p:sp>
       <p:sp>
         <p:nvSpPr>
-          <p:cNvPr id="8" name="Shape 6"/>
+          <p:cNvPr id="6" name="Shape 4"/>
           <p:cNvSpPr/>
           <p:nvPr/>
         </p:nvSpPr>
@@ -11665,7 +10310,7 @@
       </p:sp>
       <p:sp>
         <p:nvSpPr>
-          <p:cNvPr id="9" name="Shape 7"/>
+          <p:cNvPr id="7" name="Shape 5"/>
           <p:cNvSpPr/>
           <p:nvPr/>
         </p:nvSpPr>
@@ -11687,7 +10332,7 @@
       </p:sp>
       <p:sp>
         <p:nvSpPr>
-          <p:cNvPr id="10" name="Shape 8"/>
+          <p:cNvPr id="8" name="Shape 6"/>
           <p:cNvSpPr/>
           <p:nvPr/>
         </p:nvSpPr>
@@ -11707,7 +10352,7 @@
       </p:sp>
       <p:sp>
         <p:nvSpPr>
-          <p:cNvPr id="11" name="Shape 9"/>
+          <p:cNvPr id="9" name="Shape 7"/>
           <p:cNvSpPr/>
           <p:nvPr/>
         </p:nvSpPr>
@@ -11738,7 +10383,7 @@
       </p:sp>
       <p:sp>
         <p:nvSpPr>
-          <p:cNvPr id="12" name="Text 10"/>
+          <p:cNvPr id="10" name="Text 8"/>
           <p:cNvSpPr/>
           <p:nvPr/>
         </p:nvSpPr>
@@ -11779,7 +10424,7 @@
       </p:sp>
       <p:sp>
         <p:nvSpPr>
-          <p:cNvPr id="13" name="Text 11"/>
+          <p:cNvPr id="11" name="Text 9"/>
           <p:cNvSpPr/>
           <p:nvPr/>
         </p:nvSpPr>
@@ -11818,7 +10463,7 @@
       </p:sp>
       <p:sp>
         <p:nvSpPr>
-          <p:cNvPr id="14" name="Shape 12"/>
+          <p:cNvPr id="12" name="Shape 10"/>
           <p:cNvSpPr/>
           <p:nvPr/>
         </p:nvSpPr>
@@ -11852,7 +10497,7 @@
       </p:sp>
       <p:sp>
         <p:nvSpPr>
-          <p:cNvPr id="15" name="Shape 13"/>
+          <p:cNvPr id="13" name="Shape 11"/>
           <p:cNvSpPr/>
           <p:nvPr/>
         </p:nvSpPr>
@@ -11881,7 +10526,7 @@
       </p:sp>
       <p:sp>
         <p:nvSpPr>
-          <p:cNvPr id="16" name="Shape 14"/>
+          <p:cNvPr id="14" name="Shape 12"/>
           <p:cNvSpPr/>
           <p:nvPr/>
         </p:nvSpPr>
@@ -11903,7 +10548,7 @@
       </p:sp>
       <p:sp>
         <p:nvSpPr>
-          <p:cNvPr id="17" name="Shape 15"/>
+          <p:cNvPr id="15" name="Shape 13"/>
           <p:cNvSpPr/>
           <p:nvPr/>
         </p:nvSpPr>
@@ -11937,36 +10582,7 @@
       </p:sp>
       <p:sp>
         <p:nvSpPr>
-          <p:cNvPr id="18" name="Shape 16"/>
-          <p:cNvSpPr/>
-          <p:nvPr/>
-        </p:nvSpPr>
-        <p:spPr>
-          <a:xfrm>
-            <a:off x="796625" y="1500713"/>
-            <a:ext cx="190927" cy="190927"/>
-          </a:xfrm>
-          <a:prstGeom prst="roundRect">
-            <a:avLst>
-              <a:gd name="adj" fmla="val 181992"/>
-            </a:avLst>
-          </a:prstGeom>
-          <a:solidFill>
-            <a:srgbClr val="FDE68A">
-              <a:alpha val="80000"/>
-            </a:srgbClr>
-          </a:solidFill>
-          <a:ln w="12700">
-            <a:solidFill>
-              <a:srgbClr val="333333"/>
-            </a:solidFill>
-            <a:prstDash val="solid"/>
-          </a:ln>
-        </p:spPr>
-      </p:sp>
-      <p:sp>
-        <p:nvSpPr>
-          <p:cNvPr id="19" name="Text 17"/>
+          <p:cNvPr id="16" name="Text 14"/>
           <p:cNvSpPr/>
           <p:nvPr/>
         </p:nvSpPr>
@@ -12005,7 +10621,7 @@
       </p:sp>
       <p:sp>
         <p:nvSpPr>
-          <p:cNvPr id="20" name="Text 18"/>
+          <p:cNvPr id="17" name="Text 15"/>
           <p:cNvSpPr/>
           <p:nvPr/>
         </p:nvSpPr>
@@ -12025,9 +10641,6 @@
           <a:lstStyle/>
           <a:p>
             <a:pPr indent="0" marL="0">
-              <a:lnSpc>
-                <a:spcPct val="115000"/>
-              </a:lnSpc>
               <a:buNone/>
             </a:pPr>
             <a:r>
@@ -12047,7 +10660,7 @@
       </p:sp>
       <p:sp>
         <p:nvSpPr>
-          <p:cNvPr id="21" name="Shape 19"/>
+          <p:cNvPr id="18" name="Shape 16"/>
           <p:cNvSpPr/>
           <p:nvPr/>
         </p:nvSpPr>
@@ -12076,7 +10689,7 @@
       </p:sp>
       <p:sp>
         <p:nvSpPr>
-          <p:cNvPr id="22" name="Shape 20"/>
+          <p:cNvPr id="19" name="Shape 17"/>
           <p:cNvSpPr/>
           <p:nvPr/>
         </p:nvSpPr>
@@ -12098,7 +10711,7 @@
       </p:sp>
       <p:sp>
         <p:nvSpPr>
-          <p:cNvPr id="23" name="Shape 21"/>
+          <p:cNvPr id="20" name="Shape 18"/>
           <p:cNvSpPr/>
           <p:nvPr/>
         </p:nvSpPr>
@@ -12132,36 +10745,7 @@
       </p:sp>
       <p:sp>
         <p:nvSpPr>
-          <p:cNvPr id="24" name="Shape 22"/>
-          <p:cNvSpPr/>
-          <p:nvPr/>
-        </p:nvSpPr>
-        <p:spPr>
-          <a:xfrm>
-            <a:off x="796625" y="2122505"/>
-            <a:ext cx="190927" cy="190927"/>
-          </a:xfrm>
-          <a:prstGeom prst="roundRect">
-            <a:avLst>
-              <a:gd name="adj" fmla="val 181992"/>
-            </a:avLst>
-          </a:prstGeom>
-          <a:solidFill>
-            <a:srgbClr val="FDE68A">
-              <a:alpha val="80000"/>
-            </a:srgbClr>
-          </a:solidFill>
-          <a:ln w="12700">
-            <a:solidFill>
-              <a:srgbClr val="333333"/>
-            </a:solidFill>
-            <a:prstDash val="solid"/>
-          </a:ln>
-        </p:spPr>
-      </p:sp>
-      <p:sp>
-        <p:nvSpPr>
-          <p:cNvPr id="25" name="Text 23"/>
+          <p:cNvPr id="21" name="Text 19"/>
           <p:cNvSpPr/>
           <p:nvPr/>
         </p:nvSpPr>
@@ -12200,7 +10784,7 @@
       </p:sp>
       <p:sp>
         <p:nvSpPr>
-          <p:cNvPr id="26" name="Text 24"/>
+          <p:cNvPr id="22" name="Text 20"/>
           <p:cNvSpPr/>
           <p:nvPr/>
         </p:nvSpPr>
@@ -12220,9 +10804,6 @@
           <a:lstStyle/>
           <a:p>
             <a:pPr indent="0" marL="0">
-              <a:lnSpc>
-                <a:spcPct val="115000"/>
-              </a:lnSpc>
               <a:buNone/>
             </a:pPr>
             <a:r>
@@ -12242,7 +10823,7 @@
       </p:sp>
       <p:sp>
         <p:nvSpPr>
-          <p:cNvPr id="27" name="Shape 25"/>
+          <p:cNvPr id="23" name="Shape 21"/>
           <p:cNvSpPr/>
           <p:nvPr/>
         </p:nvSpPr>
@@ -12271,7 +10852,7 @@
       </p:sp>
       <p:sp>
         <p:nvSpPr>
-          <p:cNvPr id="28" name="Shape 26"/>
+          <p:cNvPr id="24" name="Shape 22"/>
           <p:cNvSpPr/>
           <p:nvPr/>
         </p:nvSpPr>
@@ -12293,7 +10874,7 @@
       </p:sp>
       <p:sp>
         <p:nvSpPr>
-          <p:cNvPr id="29" name="Shape 27"/>
+          <p:cNvPr id="25" name="Shape 23"/>
           <p:cNvSpPr/>
           <p:nvPr/>
         </p:nvSpPr>
@@ -12327,36 +10908,7 @@
       </p:sp>
       <p:sp>
         <p:nvSpPr>
-          <p:cNvPr id="30" name="Shape 28"/>
-          <p:cNvSpPr/>
-          <p:nvPr/>
-        </p:nvSpPr>
-        <p:spPr>
-          <a:xfrm>
-            <a:off x="796625" y="2744297"/>
-            <a:ext cx="190927" cy="190927"/>
-          </a:xfrm>
-          <a:prstGeom prst="roundRect">
-            <a:avLst>
-              <a:gd name="adj" fmla="val 181992"/>
-            </a:avLst>
-          </a:prstGeom>
-          <a:solidFill>
-            <a:srgbClr val="FDE68A">
-              <a:alpha val="80000"/>
-            </a:srgbClr>
-          </a:solidFill>
-          <a:ln w="12700">
-            <a:solidFill>
-              <a:srgbClr val="333333"/>
-            </a:solidFill>
-            <a:prstDash val="solid"/>
-          </a:ln>
-        </p:spPr>
-      </p:sp>
-      <p:sp>
-        <p:nvSpPr>
-          <p:cNvPr id="31" name="Text 29"/>
+          <p:cNvPr id="26" name="Text 24"/>
           <p:cNvSpPr/>
           <p:nvPr/>
         </p:nvSpPr>
@@ -12395,7 +10947,7 @@
       </p:sp>
       <p:sp>
         <p:nvSpPr>
-          <p:cNvPr id="32" name="Text 30"/>
+          <p:cNvPr id="27" name="Text 25"/>
           <p:cNvSpPr/>
           <p:nvPr/>
         </p:nvSpPr>
@@ -12415,9 +10967,6 @@
           <a:lstStyle/>
           <a:p>
             <a:pPr indent="0" marL="0">
-              <a:lnSpc>
-                <a:spcPct val="115000"/>
-              </a:lnSpc>
               <a:buNone/>
             </a:pPr>
             <a:r>
@@ -12437,7 +10986,7 @@
       </p:sp>
       <p:sp>
         <p:nvSpPr>
-          <p:cNvPr id="33" name="Shape 31"/>
+          <p:cNvPr id="28" name="Shape 26"/>
           <p:cNvSpPr/>
           <p:nvPr/>
         </p:nvSpPr>
@@ -12466,7 +11015,7 @@
       </p:sp>
       <p:sp>
         <p:nvSpPr>
-          <p:cNvPr id="34" name="Shape 32"/>
+          <p:cNvPr id="29" name="Shape 27"/>
           <p:cNvSpPr/>
           <p:nvPr/>
         </p:nvSpPr>
@@ -12488,7 +11037,7 @@
       </p:sp>
       <p:sp>
         <p:nvSpPr>
-          <p:cNvPr id="35" name="Shape 33"/>
+          <p:cNvPr id="30" name="Shape 28"/>
           <p:cNvSpPr/>
           <p:nvPr/>
         </p:nvSpPr>
@@ -12522,36 +11071,7 @@
       </p:sp>
       <p:sp>
         <p:nvSpPr>
-          <p:cNvPr id="36" name="Shape 34"/>
-          <p:cNvSpPr/>
-          <p:nvPr/>
-        </p:nvSpPr>
-        <p:spPr>
-          <a:xfrm>
-            <a:off x="796625" y="3366089"/>
-            <a:ext cx="190927" cy="190927"/>
-          </a:xfrm>
-          <a:prstGeom prst="roundRect">
-            <a:avLst>
-              <a:gd name="adj" fmla="val 181992"/>
-            </a:avLst>
-          </a:prstGeom>
-          <a:solidFill>
-            <a:srgbClr val="FDE68A">
-              <a:alpha val="80000"/>
-            </a:srgbClr>
-          </a:solidFill>
-          <a:ln w="12700">
-            <a:solidFill>
-              <a:srgbClr val="333333"/>
-            </a:solidFill>
-            <a:prstDash val="solid"/>
-          </a:ln>
-        </p:spPr>
-      </p:sp>
-      <p:sp>
-        <p:nvSpPr>
-          <p:cNvPr id="37" name="Text 35"/>
+          <p:cNvPr id="31" name="Text 29"/>
           <p:cNvSpPr/>
           <p:nvPr/>
         </p:nvSpPr>
@@ -12590,7 +11110,7 @@
       </p:sp>
       <p:sp>
         <p:nvSpPr>
-          <p:cNvPr id="38" name="Text 36"/>
+          <p:cNvPr id="32" name="Text 30"/>
           <p:cNvSpPr/>
           <p:nvPr/>
         </p:nvSpPr>
@@ -12610,9 +11130,6 @@
           <a:lstStyle/>
           <a:p>
             <a:pPr indent="0" marL="0">
-              <a:lnSpc>
-                <a:spcPct val="115000"/>
-              </a:lnSpc>
               <a:buNone/>
             </a:pPr>
             <a:r>
@@ -12632,7 +11149,7 @@
       </p:sp>
       <p:sp>
         <p:nvSpPr>
-          <p:cNvPr id="39" name="Shape 37"/>
+          <p:cNvPr id="33" name="Shape 31"/>
           <p:cNvSpPr/>
           <p:nvPr/>
         </p:nvSpPr>
@@ -12661,7 +11178,7 @@
       </p:sp>
       <p:sp>
         <p:nvSpPr>
-          <p:cNvPr id="40" name="Shape 38"/>
+          <p:cNvPr id="34" name="Shape 32"/>
           <p:cNvSpPr/>
           <p:nvPr/>
         </p:nvSpPr>
@@ -12683,7 +11200,7 @@
       </p:sp>
       <p:sp>
         <p:nvSpPr>
-          <p:cNvPr id="41" name="Shape 39"/>
+          <p:cNvPr id="35" name="Shape 33"/>
           <p:cNvSpPr/>
           <p:nvPr/>
         </p:nvSpPr>
@@ -12717,36 +11234,7 @@
       </p:sp>
       <p:sp>
         <p:nvSpPr>
-          <p:cNvPr id="42" name="Shape 40"/>
-          <p:cNvSpPr/>
-          <p:nvPr/>
-        </p:nvSpPr>
-        <p:spPr>
-          <a:xfrm>
-            <a:off x="796625" y="3987881"/>
-            <a:ext cx="190927" cy="190927"/>
-          </a:xfrm>
-          <a:prstGeom prst="roundRect">
-            <a:avLst>
-              <a:gd name="adj" fmla="val 181992"/>
-            </a:avLst>
-          </a:prstGeom>
-          <a:solidFill>
-            <a:srgbClr val="FDE68A">
-              <a:alpha val="80000"/>
-            </a:srgbClr>
-          </a:solidFill>
-          <a:ln w="12700">
-            <a:solidFill>
-              <a:srgbClr val="333333"/>
-            </a:solidFill>
-            <a:prstDash val="solid"/>
-          </a:ln>
-        </p:spPr>
-      </p:sp>
-      <p:sp>
-        <p:nvSpPr>
-          <p:cNvPr id="43" name="Text 41"/>
+          <p:cNvPr id="36" name="Text 34"/>
           <p:cNvSpPr/>
           <p:nvPr/>
         </p:nvSpPr>
@@ -12785,7 +11273,7 @@
       </p:sp>
       <p:sp>
         <p:nvSpPr>
-          <p:cNvPr id="44" name="Text 42"/>
+          <p:cNvPr id="37" name="Text 35"/>
           <p:cNvSpPr/>
           <p:nvPr/>
         </p:nvSpPr>
@@ -12805,9 +11293,6 @@
           <a:lstStyle/>
           <a:p>
             <a:pPr indent="0" marL="0">
-              <a:lnSpc>
-                <a:spcPct val="115000"/>
-              </a:lnSpc>
               <a:buNone/>
             </a:pPr>
             <a:r>
@@ -12827,7 +11312,7 @@
       </p:sp>
       <p:sp>
         <p:nvSpPr>
-          <p:cNvPr id="45" name="Shape 43"/>
+          <p:cNvPr id="38" name="Shape 36"/>
           <p:cNvSpPr/>
           <p:nvPr/>
         </p:nvSpPr>
@@ -12847,7 +11332,7 @@
       </p:sp>
       <p:sp>
         <p:nvSpPr>
-          <p:cNvPr id="46" name="Shape 44"/>
+          <p:cNvPr id="39" name="Shape 37"/>
           <p:cNvSpPr/>
           <p:nvPr/>
         </p:nvSpPr>
@@ -12869,7 +11354,7 @@
       </p:sp>
       <p:sp>
         <p:nvSpPr>
-          <p:cNvPr id="47" name="Shape 45"/>
+          <p:cNvPr id="40" name="Shape 38"/>
           <p:cNvSpPr/>
           <p:nvPr/>
         </p:nvSpPr>
@@ -12900,7 +11385,7 @@
       </p:sp>
       <p:sp>
         <p:nvSpPr>
-          <p:cNvPr id="48" name="Text 46"/>
+          <p:cNvPr id="41" name="Text 39"/>
           <p:cNvSpPr/>
           <p:nvPr/>
         </p:nvSpPr>
@@ -13051,55 +11536,6 @@
         </p:nvSpPr>
         <p:spPr>
           <a:xfrm>
-            <a:off x="7909560" y="201168"/>
-            <a:ext cx="685800" cy="685800"/>
-          </a:xfrm>
-          <a:prstGeom prst="ellipse">
-            <a:avLst/>
-          </a:prstGeom>
-          <a:solidFill>
-            <a:srgbClr val="FEF2F2">
-              <a:alpha val="0"/>
-            </a:srgbClr>
-          </a:solidFill>
-          <a:ln w="15875">
-            <a:solidFill>
-              <a:srgbClr val="FDE68A"/>
-            </a:solidFill>
-            <a:prstDash val="solid"/>
-          </a:ln>
-        </p:spPr>
-      </p:sp>
-      <p:sp>
-        <p:nvSpPr>
-          <p:cNvPr id="6" name="Shape 4"/>
-          <p:cNvSpPr/>
-          <p:nvPr/>
-        </p:nvSpPr>
-        <p:spPr>
-          <a:xfrm>
-            <a:off x="8183880" y="384048"/>
-            <a:ext cx="384048" cy="384048"/>
-          </a:xfrm>
-          <a:prstGeom prst="ellipse">
-            <a:avLst/>
-          </a:prstGeom>
-          <a:solidFill>
-            <a:srgbClr val="FDE68A">
-              <a:alpha val="35000"/>
-            </a:srgbClr>
-          </a:solidFill>
-          <a:ln/>
-        </p:spPr>
-      </p:sp>
-      <p:sp>
-        <p:nvSpPr>
-          <p:cNvPr id="7" name="Shape 5"/>
-          <p:cNvSpPr/>
-          <p:nvPr/>
-        </p:nvSpPr>
-        <p:spPr>
-          <a:xfrm>
             <a:off x="109728" y="0"/>
             <a:ext cx="9034272" cy="960120"/>
           </a:xfrm>
@@ -13114,7 +11550,7 @@
       </p:sp>
       <p:sp>
         <p:nvSpPr>
-          <p:cNvPr id="8" name="Shape 6"/>
+          <p:cNvPr id="6" name="Shape 4"/>
           <p:cNvSpPr/>
           <p:nvPr/>
         </p:nvSpPr>
@@ -13136,7 +11572,7 @@
       </p:sp>
       <p:sp>
         <p:nvSpPr>
-          <p:cNvPr id="9" name="Shape 7"/>
+          <p:cNvPr id="7" name="Shape 5"/>
           <p:cNvSpPr/>
           <p:nvPr/>
         </p:nvSpPr>
@@ -13158,7 +11594,7 @@
       </p:sp>
       <p:sp>
         <p:nvSpPr>
-          <p:cNvPr id="10" name="Shape 8"/>
+          <p:cNvPr id="8" name="Shape 6"/>
           <p:cNvSpPr/>
           <p:nvPr/>
         </p:nvSpPr>
@@ -13178,7 +11614,7 @@
       </p:sp>
       <p:sp>
         <p:nvSpPr>
-          <p:cNvPr id="11" name="Shape 9"/>
+          <p:cNvPr id="9" name="Shape 7"/>
           <p:cNvSpPr/>
           <p:nvPr/>
         </p:nvSpPr>
@@ -13209,7 +11645,7 @@
       </p:sp>
       <p:sp>
         <p:nvSpPr>
-          <p:cNvPr id="12" name="Text 10"/>
+          <p:cNvPr id="10" name="Text 8"/>
           <p:cNvSpPr/>
           <p:nvPr/>
         </p:nvSpPr>
@@ -13250,7 +11686,7 @@
       </p:sp>
       <p:sp>
         <p:nvSpPr>
-          <p:cNvPr id="13" name="Text 11"/>
+          <p:cNvPr id="11" name="Text 9"/>
           <p:cNvSpPr/>
           <p:nvPr/>
         </p:nvSpPr>
@@ -13289,7 +11725,7 @@
       </p:sp>
       <p:sp>
         <p:nvSpPr>
-          <p:cNvPr id="14" name="Shape 12"/>
+          <p:cNvPr id="12" name="Shape 10"/>
           <p:cNvSpPr/>
           <p:nvPr/>
         </p:nvSpPr>
@@ -13323,7 +11759,7 @@
       </p:sp>
       <p:sp>
         <p:nvSpPr>
-          <p:cNvPr id="15" name="Shape 13"/>
+          <p:cNvPr id="13" name="Shape 11"/>
           <p:cNvSpPr/>
           <p:nvPr/>
         </p:nvSpPr>
@@ -13352,7 +11788,7 @@
       </p:sp>
       <p:sp>
         <p:nvSpPr>
-          <p:cNvPr id="16" name="Shape 14"/>
+          <p:cNvPr id="14" name="Shape 12"/>
           <p:cNvSpPr/>
           <p:nvPr/>
         </p:nvSpPr>
@@ -13374,7 +11810,7 @@
       </p:sp>
       <p:sp>
         <p:nvSpPr>
-          <p:cNvPr id="17" name="Shape 15"/>
+          <p:cNvPr id="15" name="Shape 13"/>
           <p:cNvSpPr/>
           <p:nvPr/>
         </p:nvSpPr>
@@ -13408,36 +11844,7 @@
       </p:sp>
       <p:sp>
         <p:nvSpPr>
-          <p:cNvPr id="18" name="Shape 16"/>
-          <p:cNvSpPr/>
-          <p:nvPr/>
-        </p:nvSpPr>
-        <p:spPr>
-          <a:xfrm>
-            <a:off x="796625" y="1500713"/>
-            <a:ext cx="190927" cy="190927"/>
-          </a:xfrm>
-          <a:prstGeom prst="roundRect">
-            <a:avLst>
-              <a:gd name="adj" fmla="val 181992"/>
-            </a:avLst>
-          </a:prstGeom>
-          <a:solidFill>
-            <a:srgbClr val="FDE68A">
-              <a:alpha val="80000"/>
-            </a:srgbClr>
-          </a:solidFill>
-          <a:ln w="12700">
-            <a:solidFill>
-              <a:srgbClr val="333333"/>
-            </a:solidFill>
-            <a:prstDash val="solid"/>
-          </a:ln>
-        </p:spPr>
-      </p:sp>
-      <p:sp>
-        <p:nvSpPr>
-          <p:cNvPr id="19" name="Text 17"/>
+          <p:cNvPr id="16" name="Text 14"/>
           <p:cNvSpPr/>
           <p:nvPr/>
         </p:nvSpPr>
@@ -13476,7 +11883,7 @@
       </p:sp>
       <p:sp>
         <p:nvSpPr>
-          <p:cNvPr id="20" name="Text 18"/>
+          <p:cNvPr id="17" name="Text 15"/>
           <p:cNvSpPr/>
           <p:nvPr/>
         </p:nvSpPr>
@@ -13496,9 +11903,6 @@
           <a:lstStyle/>
           <a:p>
             <a:pPr indent="0" marL="0">
-              <a:lnSpc>
-                <a:spcPct val="115000"/>
-              </a:lnSpc>
               <a:buNone/>
             </a:pPr>
             <a:r>
@@ -13518,7 +11922,7 @@
       </p:sp>
       <p:sp>
         <p:nvSpPr>
-          <p:cNvPr id="21" name="Shape 19"/>
+          <p:cNvPr id="18" name="Shape 16"/>
           <p:cNvSpPr/>
           <p:nvPr/>
         </p:nvSpPr>
@@ -13547,7 +11951,7 @@
       </p:sp>
       <p:sp>
         <p:nvSpPr>
-          <p:cNvPr id="22" name="Shape 20"/>
+          <p:cNvPr id="19" name="Shape 17"/>
           <p:cNvSpPr/>
           <p:nvPr/>
         </p:nvSpPr>
@@ -13569,7 +11973,7 @@
       </p:sp>
       <p:sp>
         <p:nvSpPr>
-          <p:cNvPr id="23" name="Shape 21"/>
+          <p:cNvPr id="20" name="Shape 18"/>
           <p:cNvSpPr/>
           <p:nvPr/>
         </p:nvSpPr>
@@ -13603,36 +12007,7 @@
       </p:sp>
       <p:sp>
         <p:nvSpPr>
-          <p:cNvPr id="24" name="Shape 22"/>
-          <p:cNvSpPr/>
-          <p:nvPr/>
-        </p:nvSpPr>
-        <p:spPr>
-          <a:xfrm>
-            <a:off x="796625" y="2122505"/>
-            <a:ext cx="190927" cy="190927"/>
-          </a:xfrm>
-          <a:prstGeom prst="roundRect">
-            <a:avLst>
-              <a:gd name="adj" fmla="val 181992"/>
-            </a:avLst>
-          </a:prstGeom>
-          <a:solidFill>
-            <a:srgbClr val="FDE68A">
-              <a:alpha val="80000"/>
-            </a:srgbClr>
-          </a:solidFill>
-          <a:ln w="12700">
-            <a:solidFill>
-              <a:srgbClr val="333333"/>
-            </a:solidFill>
-            <a:prstDash val="solid"/>
-          </a:ln>
-        </p:spPr>
-      </p:sp>
-      <p:sp>
-        <p:nvSpPr>
-          <p:cNvPr id="25" name="Text 23"/>
+          <p:cNvPr id="21" name="Text 19"/>
           <p:cNvSpPr/>
           <p:nvPr/>
         </p:nvSpPr>
@@ -13671,7 +12046,7 @@
       </p:sp>
       <p:sp>
         <p:nvSpPr>
-          <p:cNvPr id="26" name="Text 24"/>
+          <p:cNvPr id="22" name="Text 20"/>
           <p:cNvSpPr/>
           <p:nvPr/>
         </p:nvSpPr>
@@ -13691,9 +12066,6 @@
           <a:lstStyle/>
           <a:p>
             <a:pPr indent="0" marL="0">
-              <a:lnSpc>
-                <a:spcPct val="115000"/>
-              </a:lnSpc>
               <a:buNone/>
             </a:pPr>
             <a:r>
@@ -13713,7 +12085,7 @@
       </p:sp>
       <p:sp>
         <p:nvSpPr>
-          <p:cNvPr id="27" name="Shape 25"/>
+          <p:cNvPr id="23" name="Shape 21"/>
           <p:cNvSpPr/>
           <p:nvPr/>
         </p:nvSpPr>
@@ -13742,7 +12114,7 @@
       </p:sp>
       <p:sp>
         <p:nvSpPr>
-          <p:cNvPr id="28" name="Shape 26"/>
+          <p:cNvPr id="24" name="Shape 22"/>
           <p:cNvSpPr/>
           <p:nvPr/>
         </p:nvSpPr>
@@ -13764,7 +12136,7 @@
       </p:sp>
       <p:sp>
         <p:nvSpPr>
-          <p:cNvPr id="29" name="Shape 27"/>
+          <p:cNvPr id="25" name="Shape 23"/>
           <p:cNvSpPr/>
           <p:nvPr/>
         </p:nvSpPr>
@@ -13798,36 +12170,7 @@
       </p:sp>
       <p:sp>
         <p:nvSpPr>
-          <p:cNvPr id="30" name="Shape 28"/>
-          <p:cNvSpPr/>
-          <p:nvPr/>
-        </p:nvSpPr>
-        <p:spPr>
-          <a:xfrm>
-            <a:off x="796625" y="2744297"/>
-            <a:ext cx="190927" cy="190927"/>
-          </a:xfrm>
-          <a:prstGeom prst="roundRect">
-            <a:avLst>
-              <a:gd name="adj" fmla="val 181992"/>
-            </a:avLst>
-          </a:prstGeom>
-          <a:solidFill>
-            <a:srgbClr val="FDE68A">
-              <a:alpha val="80000"/>
-            </a:srgbClr>
-          </a:solidFill>
-          <a:ln w="12700">
-            <a:solidFill>
-              <a:srgbClr val="333333"/>
-            </a:solidFill>
-            <a:prstDash val="solid"/>
-          </a:ln>
-        </p:spPr>
-      </p:sp>
-      <p:sp>
-        <p:nvSpPr>
-          <p:cNvPr id="31" name="Text 29"/>
+          <p:cNvPr id="26" name="Text 24"/>
           <p:cNvSpPr/>
           <p:nvPr/>
         </p:nvSpPr>
@@ -13866,7 +12209,7 @@
       </p:sp>
       <p:sp>
         <p:nvSpPr>
-          <p:cNvPr id="32" name="Text 30"/>
+          <p:cNvPr id="27" name="Text 25"/>
           <p:cNvSpPr/>
           <p:nvPr/>
         </p:nvSpPr>
@@ -13886,9 +12229,6 @@
           <a:lstStyle/>
           <a:p>
             <a:pPr indent="0" marL="0">
-              <a:lnSpc>
-                <a:spcPct val="115000"/>
-              </a:lnSpc>
               <a:buNone/>
             </a:pPr>
             <a:r>
@@ -13908,7 +12248,7 @@
       </p:sp>
       <p:sp>
         <p:nvSpPr>
-          <p:cNvPr id="33" name="Shape 31"/>
+          <p:cNvPr id="28" name="Shape 26"/>
           <p:cNvSpPr/>
           <p:nvPr/>
         </p:nvSpPr>
@@ -13937,7 +12277,7 @@
       </p:sp>
       <p:sp>
         <p:nvSpPr>
-          <p:cNvPr id="34" name="Shape 32"/>
+          <p:cNvPr id="29" name="Shape 27"/>
           <p:cNvSpPr/>
           <p:nvPr/>
         </p:nvSpPr>
@@ -13959,7 +12299,7 @@
       </p:sp>
       <p:sp>
         <p:nvSpPr>
-          <p:cNvPr id="35" name="Shape 33"/>
+          <p:cNvPr id="30" name="Shape 28"/>
           <p:cNvSpPr/>
           <p:nvPr/>
         </p:nvSpPr>
@@ -13993,36 +12333,7 @@
       </p:sp>
       <p:sp>
         <p:nvSpPr>
-          <p:cNvPr id="36" name="Shape 34"/>
-          <p:cNvSpPr/>
-          <p:nvPr/>
-        </p:nvSpPr>
-        <p:spPr>
-          <a:xfrm>
-            <a:off x="796625" y="3366089"/>
-            <a:ext cx="190927" cy="190927"/>
-          </a:xfrm>
-          <a:prstGeom prst="roundRect">
-            <a:avLst>
-              <a:gd name="adj" fmla="val 181992"/>
-            </a:avLst>
-          </a:prstGeom>
-          <a:solidFill>
-            <a:srgbClr val="FDE68A">
-              <a:alpha val="80000"/>
-            </a:srgbClr>
-          </a:solidFill>
-          <a:ln w="12700">
-            <a:solidFill>
-              <a:srgbClr val="333333"/>
-            </a:solidFill>
-            <a:prstDash val="solid"/>
-          </a:ln>
-        </p:spPr>
-      </p:sp>
-      <p:sp>
-        <p:nvSpPr>
-          <p:cNvPr id="37" name="Text 35"/>
+          <p:cNvPr id="31" name="Text 29"/>
           <p:cNvSpPr/>
           <p:nvPr/>
         </p:nvSpPr>
@@ -14061,7 +12372,7 @@
       </p:sp>
       <p:sp>
         <p:nvSpPr>
-          <p:cNvPr id="38" name="Text 36"/>
+          <p:cNvPr id="32" name="Text 30"/>
           <p:cNvSpPr/>
           <p:nvPr/>
         </p:nvSpPr>
@@ -14081,9 +12392,6 @@
           <a:lstStyle/>
           <a:p>
             <a:pPr indent="0" marL="0">
-              <a:lnSpc>
-                <a:spcPct val="115000"/>
-              </a:lnSpc>
               <a:buNone/>
             </a:pPr>
             <a:r>
@@ -14103,7 +12411,7 @@
       </p:sp>
       <p:sp>
         <p:nvSpPr>
-          <p:cNvPr id="39" name="Shape 37"/>
+          <p:cNvPr id="33" name="Shape 31"/>
           <p:cNvSpPr/>
           <p:nvPr/>
         </p:nvSpPr>
@@ -14132,7 +12440,7 @@
       </p:sp>
       <p:sp>
         <p:nvSpPr>
-          <p:cNvPr id="40" name="Shape 38"/>
+          <p:cNvPr id="34" name="Shape 32"/>
           <p:cNvSpPr/>
           <p:nvPr/>
         </p:nvSpPr>
@@ -14154,7 +12462,7 @@
       </p:sp>
       <p:sp>
         <p:nvSpPr>
-          <p:cNvPr id="41" name="Shape 39"/>
+          <p:cNvPr id="35" name="Shape 33"/>
           <p:cNvSpPr/>
           <p:nvPr/>
         </p:nvSpPr>
@@ -14188,36 +12496,7 @@
       </p:sp>
       <p:sp>
         <p:nvSpPr>
-          <p:cNvPr id="42" name="Shape 40"/>
-          <p:cNvSpPr/>
-          <p:nvPr/>
-        </p:nvSpPr>
-        <p:spPr>
-          <a:xfrm>
-            <a:off x="796625" y="3987881"/>
-            <a:ext cx="190927" cy="190927"/>
-          </a:xfrm>
-          <a:prstGeom prst="roundRect">
-            <a:avLst>
-              <a:gd name="adj" fmla="val 181992"/>
-            </a:avLst>
-          </a:prstGeom>
-          <a:solidFill>
-            <a:srgbClr val="FDE68A">
-              <a:alpha val="80000"/>
-            </a:srgbClr>
-          </a:solidFill>
-          <a:ln w="12700">
-            <a:solidFill>
-              <a:srgbClr val="333333"/>
-            </a:solidFill>
-            <a:prstDash val="solid"/>
-          </a:ln>
-        </p:spPr>
-      </p:sp>
-      <p:sp>
-        <p:nvSpPr>
-          <p:cNvPr id="43" name="Text 41"/>
+          <p:cNvPr id="36" name="Text 34"/>
           <p:cNvSpPr/>
           <p:nvPr/>
         </p:nvSpPr>
@@ -14256,7 +12535,7 @@
       </p:sp>
       <p:sp>
         <p:nvSpPr>
-          <p:cNvPr id="44" name="Text 42"/>
+          <p:cNvPr id="37" name="Text 35"/>
           <p:cNvSpPr/>
           <p:nvPr/>
         </p:nvSpPr>
@@ -14276,9 +12555,6 @@
           <a:lstStyle/>
           <a:p>
             <a:pPr indent="0" marL="0">
-              <a:lnSpc>
-                <a:spcPct val="115000"/>
-              </a:lnSpc>
               <a:buNone/>
             </a:pPr>
             <a:r>
@@ -14298,7 +12574,7 @@
       </p:sp>
       <p:sp>
         <p:nvSpPr>
-          <p:cNvPr id="45" name="Shape 43"/>
+          <p:cNvPr id="38" name="Shape 36"/>
           <p:cNvSpPr/>
           <p:nvPr/>
         </p:nvSpPr>
@@ -14318,7 +12594,7 @@
       </p:sp>
       <p:sp>
         <p:nvSpPr>
-          <p:cNvPr id="46" name="Shape 44"/>
+          <p:cNvPr id="39" name="Shape 37"/>
           <p:cNvSpPr/>
           <p:nvPr/>
         </p:nvSpPr>
@@ -14340,7 +12616,7 @@
       </p:sp>
       <p:sp>
         <p:nvSpPr>
-          <p:cNvPr id="47" name="Shape 45"/>
+          <p:cNvPr id="40" name="Shape 38"/>
           <p:cNvSpPr/>
           <p:nvPr/>
         </p:nvSpPr>
@@ -14371,7 +12647,7 @@
       </p:sp>
       <p:sp>
         <p:nvSpPr>
-          <p:cNvPr id="48" name="Text 46"/>
+          <p:cNvPr id="41" name="Text 39"/>
           <p:cNvSpPr/>
           <p:nvPr/>
         </p:nvSpPr>
@@ -14522,55 +12798,6 @@
         </p:nvSpPr>
         <p:spPr>
           <a:xfrm>
-            <a:off x="7909560" y="201168"/>
-            <a:ext cx="685800" cy="685800"/>
-          </a:xfrm>
-          <a:prstGeom prst="ellipse">
-            <a:avLst/>
-          </a:prstGeom>
-          <a:solidFill>
-            <a:srgbClr val="FEF2F2">
-              <a:alpha val="0"/>
-            </a:srgbClr>
-          </a:solidFill>
-          <a:ln w="15875">
-            <a:solidFill>
-              <a:srgbClr val="FDE68A"/>
-            </a:solidFill>
-            <a:prstDash val="solid"/>
-          </a:ln>
-        </p:spPr>
-      </p:sp>
-      <p:sp>
-        <p:nvSpPr>
-          <p:cNvPr id="6" name="Shape 4"/>
-          <p:cNvSpPr/>
-          <p:nvPr/>
-        </p:nvSpPr>
-        <p:spPr>
-          <a:xfrm>
-            <a:off x="8183880" y="384048"/>
-            <a:ext cx="384048" cy="384048"/>
-          </a:xfrm>
-          <a:prstGeom prst="ellipse">
-            <a:avLst/>
-          </a:prstGeom>
-          <a:solidFill>
-            <a:srgbClr val="FDE68A">
-              <a:alpha val="35000"/>
-            </a:srgbClr>
-          </a:solidFill>
-          <a:ln/>
-        </p:spPr>
-      </p:sp>
-      <p:sp>
-        <p:nvSpPr>
-          <p:cNvPr id="7" name="Shape 5"/>
-          <p:cNvSpPr/>
-          <p:nvPr/>
-        </p:nvSpPr>
-        <p:spPr>
-          <a:xfrm>
             <a:off x="109728" y="0"/>
             <a:ext cx="9034272" cy="960120"/>
           </a:xfrm>
@@ -14585,7 +12812,7 @@
       </p:sp>
       <p:sp>
         <p:nvSpPr>
-          <p:cNvPr id="8" name="Shape 6"/>
+          <p:cNvPr id="6" name="Shape 4"/>
           <p:cNvSpPr/>
           <p:nvPr/>
         </p:nvSpPr>
@@ -14607,7 +12834,7 @@
       </p:sp>
       <p:sp>
         <p:nvSpPr>
-          <p:cNvPr id="9" name="Shape 7"/>
+          <p:cNvPr id="7" name="Shape 5"/>
           <p:cNvSpPr/>
           <p:nvPr/>
         </p:nvSpPr>
@@ -14629,7 +12856,7 @@
       </p:sp>
       <p:sp>
         <p:nvSpPr>
-          <p:cNvPr id="10" name="Shape 8"/>
+          <p:cNvPr id="8" name="Shape 6"/>
           <p:cNvSpPr/>
           <p:nvPr/>
         </p:nvSpPr>
@@ -14649,7 +12876,7 @@
       </p:sp>
       <p:sp>
         <p:nvSpPr>
-          <p:cNvPr id="11" name="Shape 9"/>
+          <p:cNvPr id="9" name="Shape 7"/>
           <p:cNvSpPr/>
           <p:nvPr/>
         </p:nvSpPr>
@@ -14680,7 +12907,7 @@
       </p:sp>
       <p:sp>
         <p:nvSpPr>
-          <p:cNvPr id="12" name="Text 10"/>
+          <p:cNvPr id="10" name="Text 8"/>
           <p:cNvSpPr/>
           <p:nvPr/>
         </p:nvSpPr>
@@ -14721,7 +12948,7 @@
       </p:sp>
       <p:sp>
         <p:nvSpPr>
-          <p:cNvPr id="13" name="Text 11"/>
+          <p:cNvPr id="11" name="Text 9"/>
           <p:cNvSpPr/>
           <p:nvPr/>
         </p:nvSpPr>
@@ -14760,7 +12987,7 @@
       </p:sp>
       <p:sp>
         <p:nvSpPr>
-          <p:cNvPr id="14" name="Shape 12"/>
+          <p:cNvPr id="12" name="Shape 10"/>
           <p:cNvSpPr/>
           <p:nvPr/>
         </p:nvSpPr>
@@ -14794,7 +13021,7 @@
       </p:sp>
       <p:sp>
         <p:nvSpPr>
-          <p:cNvPr id="15" name="Shape 13"/>
+          <p:cNvPr id="13" name="Shape 11"/>
           <p:cNvSpPr/>
           <p:nvPr/>
         </p:nvSpPr>
@@ -14823,7 +13050,7 @@
       </p:sp>
       <p:sp>
         <p:nvSpPr>
-          <p:cNvPr id="16" name="Shape 14"/>
+          <p:cNvPr id="14" name="Shape 12"/>
           <p:cNvSpPr/>
           <p:nvPr/>
         </p:nvSpPr>
@@ -14845,7 +13072,7 @@
       </p:sp>
       <p:sp>
         <p:nvSpPr>
-          <p:cNvPr id="17" name="Shape 15"/>
+          <p:cNvPr id="15" name="Shape 13"/>
           <p:cNvSpPr/>
           <p:nvPr/>
         </p:nvSpPr>
@@ -14879,36 +13106,7 @@
       </p:sp>
       <p:sp>
         <p:nvSpPr>
-          <p:cNvPr id="18" name="Shape 16"/>
-          <p:cNvSpPr/>
-          <p:nvPr/>
-        </p:nvSpPr>
-        <p:spPr>
-          <a:xfrm>
-            <a:off x="796625" y="1500713"/>
-            <a:ext cx="190927" cy="190927"/>
-          </a:xfrm>
-          <a:prstGeom prst="roundRect">
-            <a:avLst>
-              <a:gd name="adj" fmla="val 181992"/>
-            </a:avLst>
-          </a:prstGeom>
-          <a:solidFill>
-            <a:srgbClr val="FDE68A">
-              <a:alpha val="80000"/>
-            </a:srgbClr>
-          </a:solidFill>
-          <a:ln w="12700">
-            <a:solidFill>
-              <a:srgbClr val="333333"/>
-            </a:solidFill>
-            <a:prstDash val="solid"/>
-          </a:ln>
-        </p:spPr>
-      </p:sp>
-      <p:sp>
-        <p:nvSpPr>
-          <p:cNvPr id="19" name="Text 17"/>
+          <p:cNvPr id="16" name="Text 14"/>
           <p:cNvSpPr/>
           <p:nvPr/>
         </p:nvSpPr>
@@ -14947,7 +13145,7 @@
       </p:sp>
       <p:sp>
         <p:nvSpPr>
-          <p:cNvPr id="20" name="Text 18"/>
+          <p:cNvPr id="17" name="Text 15"/>
           <p:cNvSpPr/>
           <p:nvPr/>
         </p:nvSpPr>
@@ -14967,9 +13165,6 @@
           <a:lstStyle/>
           <a:p>
             <a:pPr indent="0" marL="0">
-              <a:lnSpc>
-                <a:spcPct val="115000"/>
-              </a:lnSpc>
               <a:buNone/>
             </a:pPr>
             <a:r>
@@ -14989,7 +13184,7 @@
       </p:sp>
       <p:sp>
         <p:nvSpPr>
-          <p:cNvPr id="21" name="Shape 19"/>
+          <p:cNvPr id="18" name="Shape 16"/>
           <p:cNvSpPr/>
           <p:nvPr/>
         </p:nvSpPr>
@@ -15018,7 +13213,7 @@
       </p:sp>
       <p:sp>
         <p:nvSpPr>
-          <p:cNvPr id="22" name="Shape 20"/>
+          <p:cNvPr id="19" name="Shape 17"/>
           <p:cNvSpPr/>
           <p:nvPr/>
         </p:nvSpPr>
@@ -15040,7 +13235,7 @@
       </p:sp>
       <p:sp>
         <p:nvSpPr>
-          <p:cNvPr id="23" name="Shape 21"/>
+          <p:cNvPr id="20" name="Shape 18"/>
           <p:cNvSpPr/>
           <p:nvPr/>
         </p:nvSpPr>
@@ -15074,36 +13269,7 @@
       </p:sp>
       <p:sp>
         <p:nvSpPr>
-          <p:cNvPr id="24" name="Shape 22"/>
-          <p:cNvSpPr/>
-          <p:nvPr/>
-        </p:nvSpPr>
-        <p:spPr>
-          <a:xfrm>
-            <a:off x="796625" y="2122505"/>
-            <a:ext cx="190927" cy="190927"/>
-          </a:xfrm>
-          <a:prstGeom prst="roundRect">
-            <a:avLst>
-              <a:gd name="adj" fmla="val 181992"/>
-            </a:avLst>
-          </a:prstGeom>
-          <a:solidFill>
-            <a:srgbClr val="FDE68A">
-              <a:alpha val="80000"/>
-            </a:srgbClr>
-          </a:solidFill>
-          <a:ln w="12700">
-            <a:solidFill>
-              <a:srgbClr val="333333"/>
-            </a:solidFill>
-            <a:prstDash val="solid"/>
-          </a:ln>
-        </p:spPr>
-      </p:sp>
-      <p:sp>
-        <p:nvSpPr>
-          <p:cNvPr id="25" name="Text 23"/>
+          <p:cNvPr id="21" name="Text 19"/>
           <p:cNvSpPr/>
           <p:nvPr/>
         </p:nvSpPr>
@@ -15142,7 +13308,7 @@
       </p:sp>
       <p:sp>
         <p:nvSpPr>
-          <p:cNvPr id="26" name="Text 24"/>
+          <p:cNvPr id="22" name="Text 20"/>
           <p:cNvSpPr/>
           <p:nvPr/>
         </p:nvSpPr>
@@ -15162,9 +13328,6 @@
           <a:lstStyle/>
           <a:p>
             <a:pPr indent="0" marL="0">
-              <a:lnSpc>
-                <a:spcPct val="115000"/>
-              </a:lnSpc>
               <a:buNone/>
             </a:pPr>
             <a:r>
@@ -15184,7 +13347,7 @@
       </p:sp>
       <p:sp>
         <p:nvSpPr>
-          <p:cNvPr id="27" name="Shape 25"/>
+          <p:cNvPr id="23" name="Shape 21"/>
           <p:cNvSpPr/>
           <p:nvPr/>
         </p:nvSpPr>
@@ -15213,7 +13376,7 @@
       </p:sp>
       <p:sp>
         <p:nvSpPr>
-          <p:cNvPr id="28" name="Shape 26"/>
+          <p:cNvPr id="24" name="Shape 22"/>
           <p:cNvSpPr/>
           <p:nvPr/>
         </p:nvSpPr>
@@ -15235,7 +13398,7 @@
       </p:sp>
       <p:sp>
         <p:nvSpPr>
-          <p:cNvPr id="29" name="Shape 27"/>
+          <p:cNvPr id="25" name="Shape 23"/>
           <p:cNvSpPr/>
           <p:nvPr/>
         </p:nvSpPr>
@@ -15269,36 +13432,7 @@
       </p:sp>
       <p:sp>
         <p:nvSpPr>
-          <p:cNvPr id="30" name="Shape 28"/>
-          <p:cNvSpPr/>
-          <p:nvPr/>
-        </p:nvSpPr>
-        <p:spPr>
-          <a:xfrm>
-            <a:off x="796625" y="2744297"/>
-            <a:ext cx="190927" cy="190927"/>
-          </a:xfrm>
-          <a:prstGeom prst="roundRect">
-            <a:avLst>
-              <a:gd name="adj" fmla="val 181992"/>
-            </a:avLst>
-          </a:prstGeom>
-          <a:solidFill>
-            <a:srgbClr val="FDE68A">
-              <a:alpha val="80000"/>
-            </a:srgbClr>
-          </a:solidFill>
-          <a:ln w="12700">
-            <a:solidFill>
-              <a:srgbClr val="333333"/>
-            </a:solidFill>
-            <a:prstDash val="solid"/>
-          </a:ln>
-        </p:spPr>
-      </p:sp>
-      <p:sp>
-        <p:nvSpPr>
-          <p:cNvPr id="31" name="Text 29"/>
+          <p:cNvPr id="26" name="Text 24"/>
           <p:cNvSpPr/>
           <p:nvPr/>
         </p:nvSpPr>
@@ -15337,7 +13471,7 @@
       </p:sp>
       <p:sp>
         <p:nvSpPr>
-          <p:cNvPr id="32" name="Text 30"/>
+          <p:cNvPr id="27" name="Text 25"/>
           <p:cNvSpPr/>
           <p:nvPr/>
         </p:nvSpPr>
@@ -15357,9 +13491,6 @@
           <a:lstStyle/>
           <a:p>
             <a:pPr indent="0" marL="0">
-              <a:lnSpc>
-                <a:spcPct val="115000"/>
-              </a:lnSpc>
               <a:buNone/>
             </a:pPr>
             <a:r>
@@ -15379,7 +13510,7 @@
       </p:sp>
       <p:sp>
         <p:nvSpPr>
-          <p:cNvPr id="33" name="Shape 31"/>
+          <p:cNvPr id="28" name="Shape 26"/>
           <p:cNvSpPr/>
           <p:nvPr/>
         </p:nvSpPr>
@@ -15408,7 +13539,7 @@
       </p:sp>
       <p:sp>
         <p:nvSpPr>
-          <p:cNvPr id="34" name="Shape 32"/>
+          <p:cNvPr id="29" name="Shape 27"/>
           <p:cNvSpPr/>
           <p:nvPr/>
         </p:nvSpPr>
@@ -15430,7 +13561,7 @@
       </p:sp>
       <p:sp>
         <p:nvSpPr>
-          <p:cNvPr id="35" name="Shape 33"/>
+          <p:cNvPr id="30" name="Shape 28"/>
           <p:cNvSpPr/>
           <p:nvPr/>
         </p:nvSpPr>
@@ -15464,36 +13595,7 @@
       </p:sp>
       <p:sp>
         <p:nvSpPr>
-          <p:cNvPr id="36" name="Shape 34"/>
-          <p:cNvSpPr/>
-          <p:nvPr/>
-        </p:nvSpPr>
-        <p:spPr>
-          <a:xfrm>
-            <a:off x="796625" y="3366089"/>
-            <a:ext cx="190927" cy="190927"/>
-          </a:xfrm>
-          <a:prstGeom prst="roundRect">
-            <a:avLst>
-              <a:gd name="adj" fmla="val 181992"/>
-            </a:avLst>
-          </a:prstGeom>
-          <a:solidFill>
-            <a:srgbClr val="FDE68A">
-              <a:alpha val="80000"/>
-            </a:srgbClr>
-          </a:solidFill>
-          <a:ln w="12700">
-            <a:solidFill>
-              <a:srgbClr val="333333"/>
-            </a:solidFill>
-            <a:prstDash val="solid"/>
-          </a:ln>
-        </p:spPr>
-      </p:sp>
-      <p:sp>
-        <p:nvSpPr>
-          <p:cNvPr id="37" name="Text 35"/>
+          <p:cNvPr id="31" name="Text 29"/>
           <p:cNvSpPr/>
           <p:nvPr/>
         </p:nvSpPr>
@@ -15532,7 +13634,7 @@
       </p:sp>
       <p:sp>
         <p:nvSpPr>
-          <p:cNvPr id="38" name="Text 36"/>
+          <p:cNvPr id="32" name="Text 30"/>
           <p:cNvSpPr/>
           <p:nvPr/>
         </p:nvSpPr>
@@ -15552,9 +13654,6 @@
           <a:lstStyle/>
           <a:p>
             <a:pPr indent="0" marL="0">
-              <a:lnSpc>
-                <a:spcPct val="115000"/>
-              </a:lnSpc>
               <a:buNone/>
             </a:pPr>
             <a:r>
@@ -15574,7 +13673,7 @@
       </p:sp>
       <p:sp>
         <p:nvSpPr>
-          <p:cNvPr id="39" name="Shape 37"/>
+          <p:cNvPr id="33" name="Shape 31"/>
           <p:cNvSpPr/>
           <p:nvPr/>
         </p:nvSpPr>
@@ -15603,7 +13702,7 @@
       </p:sp>
       <p:sp>
         <p:nvSpPr>
-          <p:cNvPr id="40" name="Shape 38"/>
+          <p:cNvPr id="34" name="Shape 32"/>
           <p:cNvSpPr/>
           <p:nvPr/>
         </p:nvSpPr>
@@ -15625,7 +13724,7 @@
       </p:sp>
       <p:sp>
         <p:nvSpPr>
-          <p:cNvPr id="41" name="Shape 39"/>
+          <p:cNvPr id="35" name="Shape 33"/>
           <p:cNvSpPr/>
           <p:nvPr/>
         </p:nvSpPr>
@@ -15659,36 +13758,7 @@
       </p:sp>
       <p:sp>
         <p:nvSpPr>
-          <p:cNvPr id="42" name="Shape 40"/>
-          <p:cNvSpPr/>
-          <p:nvPr/>
-        </p:nvSpPr>
-        <p:spPr>
-          <a:xfrm>
-            <a:off x="796625" y="3987881"/>
-            <a:ext cx="190927" cy="190927"/>
-          </a:xfrm>
-          <a:prstGeom prst="roundRect">
-            <a:avLst>
-              <a:gd name="adj" fmla="val 181992"/>
-            </a:avLst>
-          </a:prstGeom>
-          <a:solidFill>
-            <a:srgbClr val="FDE68A">
-              <a:alpha val="80000"/>
-            </a:srgbClr>
-          </a:solidFill>
-          <a:ln w="12700">
-            <a:solidFill>
-              <a:srgbClr val="333333"/>
-            </a:solidFill>
-            <a:prstDash val="solid"/>
-          </a:ln>
-        </p:spPr>
-      </p:sp>
-      <p:sp>
-        <p:nvSpPr>
-          <p:cNvPr id="43" name="Text 41"/>
+          <p:cNvPr id="36" name="Text 34"/>
           <p:cNvSpPr/>
           <p:nvPr/>
         </p:nvSpPr>
@@ -15727,7 +13797,7 @@
       </p:sp>
       <p:sp>
         <p:nvSpPr>
-          <p:cNvPr id="44" name="Text 42"/>
+          <p:cNvPr id="37" name="Text 35"/>
           <p:cNvSpPr/>
           <p:nvPr/>
         </p:nvSpPr>
@@ -15747,9 +13817,6 @@
           <a:lstStyle/>
           <a:p>
             <a:pPr indent="0" marL="0">
-              <a:lnSpc>
-                <a:spcPct val="115000"/>
-              </a:lnSpc>
               <a:buNone/>
             </a:pPr>
             <a:r>
@@ -15769,7 +13836,7 @@
       </p:sp>
       <p:sp>
         <p:nvSpPr>
-          <p:cNvPr id="45" name="Shape 43"/>
+          <p:cNvPr id="38" name="Shape 36"/>
           <p:cNvSpPr/>
           <p:nvPr/>
         </p:nvSpPr>
@@ -15789,7 +13856,7 @@
       </p:sp>
       <p:sp>
         <p:nvSpPr>
-          <p:cNvPr id="46" name="Shape 44"/>
+          <p:cNvPr id="39" name="Shape 37"/>
           <p:cNvSpPr/>
           <p:nvPr/>
         </p:nvSpPr>
@@ -15811,7 +13878,7 @@
       </p:sp>
       <p:sp>
         <p:nvSpPr>
-          <p:cNvPr id="47" name="Shape 45"/>
+          <p:cNvPr id="40" name="Shape 38"/>
           <p:cNvSpPr/>
           <p:nvPr/>
         </p:nvSpPr>
@@ -15842,7 +13909,7 @@
       </p:sp>
       <p:sp>
         <p:nvSpPr>
-          <p:cNvPr id="48" name="Text 46"/>
+          <p:cNvPr id="41" name="Text 39"/>
           <p:cNvSpPr/>
           <p:nvPr/>
         </p:nvSpPr>
@@ -15993,55 +14060,6 @@
         </p:nvSpPr>
         <p:spPr>
           <a:xfrm>
-            <a:off x="7909560" y="201168"/>
-            <a:ext cx="685800" cy="685800"/>
-          </a:xfrm>
-          <a:prstGeom prst="ellipse">
-            <a:avLst/>
-          </a:prstGeom>
-          <a:solidFill>
-            <a:srgbClr val="FEF2F2">
-              <a:alpha val="0"/>
-            </a:srgbClr>
-          </a:solidFill>
-          <a:ln w="15875">
-            <a:solidFill>
-              <a:srgbClr val="FDE68A"/>
-            </a:solidFill>
-            <a:prstDash val="solid"/>
-          </a:ln>
-        </p:spPr>
-      </p:sp>
-      <p:sp>
-        <p:nvSpPr>
-          <p:cNvPr id="6" name="Shape 4"/>
-          <p:cNvSpPr/>
-          <p:nvPr/>
-        </p:nvSpPr>
-        <p:spPr>
-          <a:xfrm>
-            <a:off x="8183880" y="384048"/>
-            <a:ext cx="384048" cy="384048"/>
-          </a:xfrm>
-          <a:prstGeom prst="ellipse">
-            <a:avLst/>
-          </a:prstGeom>
-          <a:solidFill>
-            <a:srgbClr val="FDE68A">
-              <a:alpha val="35000"/>
-            </a:srgbClr>
-          </a:solidFill>
-          <a:ln/>
-        </p:spPr>
-      </p:sp>
-      <p:sp>
-        <p:nvSpPr>
-          <p:cNvPr id="7" name="Shape 5"/>
-          <p:cNvSpPr/>
-          <p:nvPr/>
-        </p:nvSpPr>
-        <p:spPr>
-          <a:xfrm>
             <a:off x="109728" y="0"/>
             <a:ext cx="9034272" cy="960120"/>
           </a:xfrm>
@@ -16056,7 +14074,7 @@
       </p:sp>
       <p:sp>
         <p:nvSpPr>
-          <p:cNvPr id="8" name="Shape 6"/>
+          <p:cNvPr id="6" name="Shape 4"/>
           <p:cNvSpPr/>
           <p:nvPr/>
         </p:nvSpPr>
@@ -16078,7 +14096,7 @@
       </p:sp>
       <p:sp>
         <p:nvSpPr>
-          <p:cNvPr id="9" name="Shape 7"/>
+          <p:cNvPr id="7" name="Shape 5"/>
           <p:cNvSpPr/>
           <p:nvPr/>
         </p:nvSpPr>
@@ -16100,7 +14118,7 @@
       </p:sp>
       <p:sp>
         <p:nvSpPr>
-          <p:cNvPr id="10" name="Shape 8"/>
+          <p:cNvPr id="8" name="Shape 6"/>
           <p:cNvSpPr/>
           <p:nvPr/>
         </p:nvSpPr>
@@ -16120,7 +14138,7 @@
       </p:sp>
       <p:sp>
         <p:nvSpPr>
-          <p:cNvPr id="11" name="Shape 9"/>
+          <p:cNvPr id="9" name="Shape 7"/>
           <p:cNvSpPr/>
           <p:nvPr/>
         </p:nvSpPr>
@@ -16151,7 +14169,7 @@
       </p:sp>
       <p:sp>
         <p:nvSpPr>
-          <p:cNvPr id="12" name="Text 10"/>
+          <p:cNvPr id="10" name="Text 8"/>
           <p:cNvSpPr/>
           <p:nvPr/>
         </p:nvSpPr>
@@ -16192,7 +14210,7 @@
       </p:sp>
       <p:sp>
         <p:nvSpPr>
-          <p:cNvPr id="13" name="Text 11"/>
+          <p:cNvPr id="11" name="Text 9"/>
           <p:cNvSpPr/>
           <p:nvPr/>
         </p:nvSpPr>
@@ -16231,7 +14249,7 @@
       </p:sp>
       <p:sp>
         <p:nvSpPr>
-          <p:cNvPr id="14" name="Shape 12"/>
+          <p:cNvPr id="12" name="Shape 10"/>
           <p:cNvSpPr/>
           <p:nvPr/>
         </p:nvSpPr>
@@ -16265,7 +14283,7 @@
       </p:sp>
       <p:sp>
         <p:nvSpPr>
-          <p:cNvPr id="15" name="Shape 13"/>
+          <p:cNvPr id="13" name="Shape 11"/>
           <p:cNvSpPr/>
           <p:nvPr/>
         </p:nvSpPr>
@@ -16294,7 +14312,7 @@
       </p:sp>
       <p:sp>
         <p:nvSpPr>
-          <p:cNvPr id="16" name="Shape 14"/>
+          <p:cNvPr id="14" name="Shape 12"/>
           <p:cNvSpPr/>
           <p:nvPr/>
         </p:nvSpPr>
@@ -16316,7 +14334,7 @@
       </p:sp>
       <p:sp>
         <p:nvSpPr>
-          <p:cNvPr id="17" name="Shape 15"/>
+          <p:cNvPr id="15" name="Shape 13"/>
           <p:cNvSpPr/>
           <p:nvPr/>
         </p:nvSpPr>
@@ -16350,36 +14368,7 @@
       </p:sp>
       <p:sp>
         <p:nvSpPr>
-          <p:cNvPr id="18" name="Shape 16"/>
-          <p:cNvSpPr/>
-          <p:nvPr/>
-        </p:nvSpPr>
-        <p:spPr>
-          <a:xfrm>
-            <a:off x="796625" y="1500713"/>
-            <a:ext cx="190927" cy="190927"/>
-          </a:xfrm>
-          <a:prstGeom prst="roundRect">
-            <a:avLst>
-              <a:gd name="adj" fmla="val 181992"/>
-            </a:avLst>
-          </a:prstGeom>
-          <a:solidFill>
-            <a:srgbClr val="FDE68A">
-              <a:alpha val="80000"/>
-            </a:srgbClr>
-          </a:solidFill>
-          <a:ln w="12700">
-            <a:solidFill>
-              <a:srgbClr val="333333"/>
-            </a:solidFill>
-            <a:prstDash val="solid"/>
-          </a:ln>
-        </p:spPr>
-      </p:sp>
-      <p:sp>
-        <p:nvSpPr>
-          <p:cNvPr id="19" name="Text 17"/>
+          <p:cNvPr id="16" name="Text 14"/>
           <p:cNvSpPr/>
           <p:nvPr/>
         </p:nvSpPr>
@@ -16418,7 +14407,7 @@
       </p:sp>
       <p:sp>
         <p:nvSpPr>
-          <p:cNvPr id="20" name="Text 18"/>
+          <p:cNvPr id="17" name="Text 15"/>
           <p:cNvSpPr/>
           <p:nvPr/>
         </p:nvSpPr>
@@ -16438,9 +14427,6 @@
           <a:lstStyle/>
           <a:p>
             <a:pPr indent="0" marL="0">
-              <a:lnSpc>
-                <a:spcPct val="115000"/>
-              </a:lnSpc>
               <a:buNone/>
             </a:pPr>
             <a:r>
@@ -16460,7 +14446,7 @@
       </p:sp>
       <p:sp>
         <p:nvSpPr>
-          <p:cNvPr id="21" name="Shape 19"/>
+          <p:cNvPr id="18" name="Shape 16"/>
           <p:cNvSpPr/>
           <p:nvPr/>
         </p:nvSpPr>
@@ -16489,7 +14475,7 @@
       </p:sp>
       <p:sp>
         <p:nvSpPr>
-          <p:cNvPr id="22" name="Shape 20"/>
+          <p:cNvPr id="19" name="Shape 17"/>
           <p:cNvSpPr/>
           <p:nvPr/>
         </p:nvSpPr>
@@ -16511,7 +14497,7 @@
       </p:sp>
       <p:sp>
         <p:nvSpPr>
-          <p:cNvPr id="23" name="Shape 21"/>
+          <p:cNvPr id="20" name="Shape 18"/>
           <p:cNvSpPr/>
           <p:nvPr/>
         </p:nvSpPr>
@@ -16545,36 +14531,7 @@
       </p:sp>
       <p:sp>
         <p:nvSpPr>
-          <p:cNvPr id="24" name="Shape 22"/>
-          <p:cNvSpPr/>
-          <p:nvPr/>
-        </p:nvSpPr>
-        <p:spPr>
-          <a:xfrm>
-            <a:off x="796625" y="2122505"/>
-            <a:ext cx="190927" cy="190927"/>
-          </a:xfrm>
-          <a:prstGeom prst="roundRect">
-            <a:avLst>
-              <a:gd name="adj" fmla="val 181992"/>
-            </a:avLst>
-          </a:prstGeom>
-          <a:solidFill>
-            <a:srgbClr val="FDE68A">
-              <a:alpha val="80000"/>
-            </a:srgbClr>
-          </a:solidFill>
-          <a:ln w="12700">
-            <a:solidFill>
-              <a:srgbClr val="333333"/>
-            </a:solidFill>
-            <a:prstDash val="solid"/>
-          </a:ln>
-        </p:spPr>
-      </p:sp>
-      <p:sp>
-        <p:nvSpPr>
-          <p:cNvPr id="25" name="Text 23"/>
+          <p:cNvPr id="21" name="Text 19"/>
           <p:cNvSpPr/>
           <p:nvPr/>
         </p:nvSpPr>
@@ -16613,7 +14570,7 @@
       </p:sp>
       <p:sp>
         <p:nvSpPr>
-          <p:cNvPr id="26" name="Text 24"/>
+          <p:cNvPr id="22" name="Text 20"/>
           <p:cNvSpPr/>
           <p:nvPr/>
         </p:nvSpPr>
@@ -16633,9 +14590,6 @@
           <a:lstStyle/>
           <a:p>
             <a:pPr indent="0" marL="0">
-              <a:lnSpc>
-                <a:spcPct val="115000"/>
-              </a:lnSpc>
               <a:buNone/>
             </a:pPr>
             <a:r>
@@ -16655,7 +14609,7 @@
       </p:sp>
       <p:sp>
         <p:nvSpPr>
-          <p:cNvPr id="27" name="Shape 25"/>
+          <p:cNvPr id="23" name="Shape 21"/>
           <p:cNvSpPr/>
           <p:nvPr/>
         </p:nvSpPr>
@@ -16684,7 +14638,7 @@
       </p:sp>
       <p:sp>
         <p:nvSpPr>
-          <p:cNvPr id="28" name="Shape 26"/>
+          <p:cNvPr id="24" name="Shape 22"/>
           <p:cNvSpPr/>
           <p:nvPr/>
         </p:nvSpPr>
@@ -16706,7 +14660,7 @@
       </p:sp>
       <p:sp>
         <p:nvSpPr>
-          <p:cNvPr id="29" name="Shape 27"/>
+          <p:cNvPr id="25" name="Shape 23"/>
           <p:cNvSpPr/>
           <p:nvPr/>
         </p:nvSpPr>
@@ -16740,36 +14694,7 @@
       </p:sp>
       <p:sp>
         <p:nvSpPr>
-          <p:cNvPr id="30" name="Shape 28"/>
-          <p:cNvSpPr/>
-          <p:nvPr/>
-        </p:nvSpPr>
-        <p:spPr>
-          <a:xfrm>
-            <a:off x="796625" y="2744297"/>
-            <a:ext cx="190927" cy="190927"/>
-          </a:xfrm>
-          <a:prstGeom prst="roundRect">
-            <a:avLst>
-              <a:gd name="adj" fmla="val 181992"/>
-            </a:avLst>
-          </a:prstGeom>
-          <a:solidFill>
-            <a:srgbClr val="FDE68A">
-              <a:alpha val="80000"/>
-            </a:srgbClr>
-          </a:solidFill>
-          <a:ln w="12700">
-            <a:solidFill>
-              <a:srgbClr val="333333"/>
-            </a:solidFill>
-            <a:prstDash val="solid"/>
-          </a:ln>
-        </p:spPr>
-      </p:sp>
-      <p:sp>
-        <p:nvSpPr>
-          <p:cNvPr id="31" name="Text 29"/>
+          <p:cNvPr id="26" name="Text 24"/>
           <p:cNvSpPr/>
           <p:nvPr/>
         </p:nvSpPr>
@@ -16808,7 +14733,7 @@
       </p:sp>
       <p:sp>
         <p:nvSpPr>
-          <p:cNvPr id="32" name="Text 30"/>
+          <p:cNvPr id="27" name="Text 25"/>
           <p:cNvSpPr/>
           <p:nvPr/>
         </p:nvSpPr>
@@ -16828,9 +14753,6 @@
           <a:lstStyle/>
           <a:p>
             <a:pPr indent="0" marL="0">
-              <a:lnSpc>
-                <a:spcPct val="115000"/>
-              </a:lnSpc>
               <a:buNone/>
             </a:pPr>
             <a:r>
@@ -16850,7 +14772,7 @@
       </p:sp>
       <p:sp>
         <p:nvSpPr>
-          <p:cNvPr id="33" name="Shape 31"/>
+          <p:cNvPr id="28" name="Shape 26"/>
           <p:cNvSpPr/>
           <p:nvPr/>
         </p:nvSpPr>
@@ -16879,7 +14801,7 @@
       </p:sp>
       <p:sp>
         <p:nvSpPr>
-          <p:cNvPr id="34" name="Shape 32"/>
+          <p:cNvPr id="29" name="Shape 27"/>
           <p:cNvSpPr/>
           <p:nvPr/>
         </p:nvSpPr>
@@ -16901,7 +14823,7 @@
       </p:sp>
       <p:sp>
         <p:nvSpPr>
-          <p:cNvPr id="35" name="Shape 33"/>
+          <p:cNvPr id="30" name="Shape 28"/>
           <p:cNvSpPr/>
           <p:nvPr/>
         </p:nvSpPr>
@@ -16935,36 +14857,7 @@
       </p:sp>
       <p:sp>
         <p:nvSpPr>
-          <p:cNvPr id="36" name="Shape 34"/>
-          <p:cNvSpPr/>
-          <p:nvPr/>
-        </p:nvSpPr>
-        <p:spPr>
-          <a:xfrm>
-            <a:off x="796625" y="3366089"/>
-            <a:ext cx="190927" cy="190927"/>
-          </a:xfrm>
-          <a:prstGeom prst="roundRect">
-            <a:avLst>
-              <a:gd name="adj" fmla="val 181992"/>
-            </a:avLst>
-          </a:prstGeom>
-          <a:solidFill>
-            <a:srgbClr val="FDE68A">
-              <a:alpha val="80000"/>
-            </a:srgbClr>
-          </a:solidFill>
-          <a:ln w="12700">
-            <a:solidFill>
-              <a:srgbClr val="333333"/>
-            </a:solidFill>
-            <a:prstDash val="solid"/>
-          </a:ln>
-        </p:spPr>
-      </p:sp>
-      <p:sp>
-        <p:nvSpPr>
-          <p:cNvPr id="37" name="Text 35"/>
+          <p:cNvPr id="31" name="Text 29"/>
           <p:cNvSpPr/>
           <p:nvPr/>
         </p:nvSpPr>
@@ -17003,7 +14896,7 @@
       </p:sp>
       <p:sp>
         <p:nvSpPr>
-          <p:cNvPr id="38" name="Text 36"/>
+          <p:cNvPr id="32" name="Text 30"/>
           <p:cNvSpPr/>
           <p:nvPr/>
         </p:nvSpPr>
@@ -17023,9 +14916,6 @@
           <a:lstStyle/>
           <a:p>
             <a:pPr indent="0" marL="0">
-              <a:lnSpc>
-                <a:spcPct val="115000"/>
-              </a:lnSpc>
               <a:buNone/>
             </a:pPr>
             <a:r>
@@ -17045,7 +14935,7 @@
       </p:sp>
       <p:sp>
         <p:nvSpPr>
-          <p:cNvPr id="39" name="Shape 37"/>
+          <p:cNvPr id="33" name="Shape 31"/>
           <p:cNvSpPr/>
           <p:nvPr/>
         </p:nvSpPr>
@@ -17074,7 +14964,7 @@
       </p:sp>
       <p:sp>
         <p:nvSpPr>
-          <p:cNvPr id="40" name="Shape 38"/>
+          <p:cNvPr id="34" name="Shape 32"/>
           <p:cNvSpPr/>
           <p:nvPr/>
         </p:nvSpPr>
@@ -17096,7 +14986,7 @@
       </p:sp>
       <p:sp>
         <p:nvSpPr>
-          <p:cNvPr id="41" name="Shape 39"/>
+          <p:cNvPr id="35" name="Shape 33"/>
           <p:cNvSpPr/>
           <p:nvPr/>
         </p:nvSpPr>
@@ -17130,36 +15020,7 @@
       </p:sp>
       <p:sp>
         <p:nvSpPr>
-          <p:cNvPr id="42" name="Shape 40"/>
-          <p:cNvSpPr/>
-          <p:nvPr/>
-        </p:nvSpPr>
-        <p:spPr>
-          <a:xfrm>
-            <a:off x="796625" y="3987881"/>
-            <a:ext cx="190927" cy="190927"/>
-          </a:xfrm>
-          <a:prstGeom prst="roundRect">
-            <a:avLst>
-              <a:gd name="adj" fmla="val 181992"/>
-            </a:avLst>
-          </a:prstGeom>
-          <a:solidFill>
-            <a:srgbClr val="FDE68A">
-              <a:alpha val="80000"/>
-            </a:srgbClr>
-          </a:solidFill>
-          <a:ln w="12700">
-            <a:solidFill>
-              <a:srgbClr val="333333"/>
-            </a:solidFill>
-            <a:prstDash val="solid"/>
-          </a:ln>
-        </p:spPr>
-      </p:sp>
-      <p:sp>
-        <p:nvSpPr>
-          <p:cNvPr id="43" name="Text 41"/>
+          <p:cNvPr id="36" name="Text 34"/>
           <p:cNvSpPr/>
           <p:nvPr/>
         </p:nvSpPr>
@@ -17198,7 +15059,7 @@
       </p:sp>
       <p:sp>
         <p:nvSpPr>
-          <p:cNvPr id="44" name="Text 42"/>
+          <p:cNvPr id="37" name="Text 35"/>
           <p:cNvSpPr/>
           <p:nvPr/>
         </p:nvSpPr>
@@ -17218,9 +15079,6 @@
           <a:lstStyle/>
           <a:p>
             <a:pPr indent="0" marL="0">
-              <a:lnSpc>
-                <a:spcPct val="115000"/>
-              </a:lnSpc>
               <a:buNone/>
             </a:pPr>
             <a:r>
@@ -17240,7 +15098,7 @@
       </p:sp>
       <p:sp>
         <p:nvSpPr>
-          <p:cNvPr id="45" name="Shape 43"/>
+          <p:cNvPr id="38" name="Shape 36"/>
           <p:cNvSpPr/>
           <p:nvPr/>
         </p:nvSpPr>
@@ -17260,7 +15118,7 @@
       </p:sp>
       <p:sp>
         <p:nvSpPr>
-          <p:cNvPr id="46" name="Shape 44"/>
+          <p:cNvPr id="39" name="Shape 37"/>
           <p:cNvSpPr/>
           <p:nvPr/>
         </p:nvSpPr>
@@ -17282,7 +15140,7 @@
       </p:sp>
       <p:sp>
         <p:nvSpPr>
-          <p:cNvPr id="47" name="Shape 45"/>
+          <p:cNvPr id="40" name="Shape 38"/>
           <p:cNvSpPr/>
           <p:nvPr/>
         </p:nvSpPr>
@@ -17313,7 +15171,7 @@
       </p:sp>
       <p:sp>
         <p:nvSpPr>
-          <p:cNvPr id="48" name="Text 46"/>
+          <p:cNvPr id="41" name="Text 39"/>
           <p:cNvSpPr/>
           <p:nvPr/>
         </p:nvSpPr>
